--- a/论文图片/图片转pdf/第三章/感知自适应动态分辨率渲染框架.pptx
+++ b/论文图片/图片转pdf/第三章/感知自适应动态分辨率渲染框架.pptx
@@ -7,7 +7,7 @@
   <p:sldIdLst>
     <p:sldId id="256" r:id="rId3"/>
   </p:sldIdLst>
-  <p:sldSz cx="12192000" cy="6858000"/>
+  <p:sldSz cx="11519535" cy="6119495"/>
   <p:notesSz cx="6858000" cy="9144000"/>
   <p:defaultTextStyle>
     <a:defPPr>
@@ -107,12 +107,12 @@
   <p:extLst>
     <p:ext uri="{EFAFB233-063F-42B5-8137-9DF3F51BA10A}">
       <p15:sldGuideLst xmlns:p15="http://schemas.microsoft.com/office/powerpoint/2012/main">
-        <p15:guide id="1" orient="horz" pos="2160" userDrawn="1">
+        <p15:guide id="1" orient="horz" pos="1952" userDrawn="1">
           <p15:clr>
             <a:srgbClr val="A4A3A4"/>
           </p15:clr>
         </p15:guide>
-        <p15:guide id="2" pos="3840" userDrawn="1">
+        <p15:guide id="2" pos="3568" userDrawn="1">
           <p15:clr>
             <a:srgbClr val="A4A3A4"/>
           </p15:clr>
@@ -152,15 +152,15 @@
         </p:nvSpPr>
         <p:spPr>
           <a:xfrm>
-            <a:off x="1524000" y="1122363"/>
-            <a:ext cx="9144000" cy="2387600"/>
+            <a:off x="1440000" y="1001584"/>
+            <a:ext cx="8640000" cy="2130667"/>
           </a:xfrm>
         </p:spPr>
         <p:txBody>
           <a:bodyPr anchor="b"/>
           <a:lstStyle>
             <a:lvl1pPr algn="ctr">
-              <a:defRPr sz="6000"/>
+              <a:defRPr sz="5355"/>
             </a:lvl1pPr>
           </a:lstStyle>
           <a:p>
@@ -184,8 +184,8 @@
         </p:nvSpPr>
         <p:spPr>
           <a:xfrm>
-            <a:off x="1524000" y="3602038"/>
-            <a:ext cx="9144000" cy="1655762"/>
+            <a:off x="1440000" y="3214417"/>
+            <a:ext cx="8640000" cy="1477583"/>
           </a:xfrm>
         </p:spPr>
         <p:txBody>
@@ -193,39 +193,39 @@
           <a:lstStyle>
             <a:lvl1pPr marL="0" indent="0" algn="ctr">
               <a:buNone/>
-              <a:defRPr sz="2400"/>
+              <a:defRPr sz="2140"/>
             </a:lvl1pPr>
-            <a:lvl2pPr marL="457200" indent="0" algn="ctr">
+            <a:lvl2pPr marL="408305" indent="0" algn="ctr">
               <a:buNone/>
-              <a:defRPr sz="2000"/>
+              <a:defRPr sz="1785"/>
             </a:lvl2pPr>
-            <a:lvl3pPr marL="914400" indent="0" algn="ctr">
+            <a:lvl3pPr marL="815975" indent="0" algn="ctr">
               <a:buNone/>
-              <a:defRPr sz="1800"/>
+              <a:defRPr sz="1605"/>
             </a:lvl3pPr>
-            <a:lvl4pPr marL="1371600" indent="0" algn="ctr">
+            <a:lvl4pPr marL="1224280" indent="0" algn="ctr">
               <a:buNone/>
-              <a:defRPr sz="1600"/>
+              <a:defRPr sz="1430"/>
             </a:lvl4pPr>
-            <a:lvl5pPr marL="1828800" indent="0" algn="ctr">
+            <a:lvl5pPr marL="1631950" indent="0" algn="ctr">
               <a:buNone/>
-              <a:defRPr sz="1600"/>
+              <a:defRPr sz="1430"/>
             </a:lvl5pPr>
-            <a:lvl6pPr marL="2286000" indent="0" algn="ctr">
+            <a:lvl6pPr marL="2040255" indent="0" algn="ctr">
               <a:buNone/>
-              <a:defRPr sz="1600"/>
+              <a:defRPr sz="1430"/>
             </a:lvl6pPr>
-            <a:lvl7pPr marL="2743200" indent="0" algn="ctr">
+            <a:lvl7pPr marL="2447925" indent="0" algn="ctr">
               <a:buNone/>
-              <a:defRPr sz="1600"/>
+              <a:defRPr sz="1430"/>
             </a:lvl7pPr>
-            <a:lvl8pPr marL="3200400" indent="0" algn="ctr">
+            <a:lvl8pPr marL="2856230" indent="0" algn="ctr">
               <a:buNone/>
-              <a:defRPr sz="1600"/>
+              <a:defRPr sz="1430"/>
             </a:lvl8pPr>
-            <a:lvl9pPr marL="3657600" indent="0" algn="ctr">
+            <a:lvl9pPr marL="3263900" indent="0" algn="ctr">
               <a:buNone/>
-              <a:defRPr sz="1600"/>
+              <a:defRPr sz="1430"/>
             </a:lvl9pPr>
           </a:lstStyle>
           <a:p>
@@ -504,8 +504,8 @@
         </p:nvSpPr>
         <p:spPr>
           <a:xfrm>
-            <a:off x="8724900" y="365125"/>
-            <a:ext cx="2628900" cy="5811838"/>
+            <a:off x="8244000" y="325833"/>
+            <a:ext cx="2484000" cy="5186417"/>
           </a:xfrm>
         </p:spPr>
         <p:txBody>
@@ -532,8 +532,8 @@
         </p:nvSpPr>
         <p:spPr>
           <a:xfrm>
-            <a:off x="838200" y="365125"/>
-            <a:ext cx="7734300" cy="5811838"/>
+            <a:off x="792000" y="325833"/>
+            <a:ext cx="7308000" cy="5186417"/>
           </a:xfrm>
         </p:spPr>
         <p:txBody>
@@ -848,15 +848,15 @@
         </p:nvSpPr>
         <p:spPr>
           <a:xfrm>
-            <a:off x="831850" y="1709738"/>
-            <a:ext cx="10515600" cy="2852737"/>
+            <a:off x="786000" y="1525750"/>
+            <a:ext cx="9936000" cy="2545749"/>
           </a:xfrm>
         </p:spPr>
         <p:txBody>
           <a:bodyPr anchor="b"/>
           <a:lstStyle>
             <a:lvl1pPr>
-              <a:defRPr sz="6000"/>
+              <a:defRPr sz="5355"/>
             </a:lvl1pPr>
           </a:lstStyle>
           <a:p>
@@ -880,8 +880,8 @@
         </p:nvSpPr>
         <p:spPr>
           <a:xfrm>
-            <a:off x="831850" y="4589463"/>
-            <a:ext cx="10515600" cy="1500187"/>
+            <a:off x="786000" y="4095584"/>
+            <a:ext cx="9936000" cy="1338750"/>
           </a:xfrm>
         </p:spPr>
         <p:txBody>
@@ -889,7 +889,7 @@
           <a:lstStyle>
             <a:lvl1pPr marL="0" indent="0">
               <a:buNone/>
-              <a:defRPr sz="2400">
+              <a:defRPr sz="2140">
                 <a:solidFill>
                   <a:schemeClr val="tx1">
                     <a:tint val="75000"/>
@@ -897,9 +897,9 @@
                 </a:solidFill>
               </a:defRPr>
             </a:lvl1pPr>
-            <a:lvl2pPr marL="457200" indent="0">
+            <a:lvl2pPr marL="408305" indent="0">
               <a:buNone/>
-              <a:defRPr sz="2000">
+              <a:defRPr sz="1785">
                 <a:solidFill>
                   <a:schemeClr val="tx1">
                     <a:tint val="75000"/>
@@ -907,9 +907,9 @@
                 </a:solidFill>
               </a:defRPr>
             </a:lvl2pPr>
-            <a:lvl3pPr marL="914400" indent="0">
+            <a:lvl3pPr marL="815975" indent="0">
               <a:buNone/>
-              <a:defRPr sz="1800">
+              <a:defRPr sz="1605">
                 <a:solidFill>
                   <a:schemeClr val="tx1">
                     <a:tint val="75000"/>
@@ -917,9 +917,9 @@
                 </a:solidFill>
               </a:defRPr>
             </a:lvl3pPr>
-            <a:lvl4pPr marL="1371600" indent="0">
+            <a:lvl4pPr marL="1224280" indent="0">
               <a:buNone/>
-              <a:defRPr sz="1600">
+              <a:defRPr sz="1430">
                 <a:solidFill>
                   <a:schemeClr val="tx1">
                     <a:tint val="75000"/>
@@ -927,9 +927,9 @@
                 </a:solidFill>
               </a:defRPr>
             </a:lvl4pPr>
-            <a:lvl5pPr marL="1828800" indent="0">
+            <a:lvl5pPr marL="1631950" indent="0">
               <a:buNone/>
-              <a:defRPr sz="1600">
+              <a:defRPr sz="1430">
                 <a:solidFill>
                   <a:schemeClr val="tx1">
                     <a:tint val="75000"/>
@@ -937,9 +937,9 @@
                 </a:solidFill>
               </a:defRPr>
             </a:lvl5pPr>
-            <a:lvl6pPr marL="2286000" indent="0">
+            <a:lvl6pPr marL="2040255" indent="0">
               <a:buNone/>
-              <a:defRPr sz="1600">
+              <a:defRPr sz="1430">
                 <a:solidFill>
                   <a:schemeClr val="tx1">
                     <a:tint val="75000"/>
@@ -947,9 +947,9 @@
                 </a:solidFill>
               </a:defRPr>
             </a:lvl6pPr>
-            <a:lvl7pPr marL="2743200" indent="0">
+            <a:lvl7pPr marL="2447925" indent="0">
               <a:buNone/>
-              <a:defRPr sz="1600">
+              <a:defRPr sz="1430">
                 <a:solidFill>
                   <a:schemeClr val="tx1">
                     <a:tint val="75000"/>
@@ -957,9 +957,9 @@
                 </a:solidFill>
               </a:defRPr>
             </a:lvl7pPr>
-            <a:lvl8pPr marL="3200400" indent="0">
+            <a:lvl8pPr marL="2856230" indent="0">
               <a:buNone/>
-              <a:defRPr sz="1600">
+              <a:defRPr sz="1430">
                 <a:solidFill>
                   <a:schemeClr val="tx1">
                     <a:tint val="75000"/>
@@ -967,9 +967,9 @@
                 </a:solidFill>
               </a:defRPr>
             </a:lvl8pPr>
-            <a:lvl9pPr marL="3657600" indent="0">
+            <a:lvl9pPr marL="3263900" indent="0">
               <a:buNone/>
-              <a:defRPr sz="1600">
+              <a:defRPr sz="1430">
                 <a:solidFill>
                   <a:schemeClr val="tx1">
                     <a:tint val="75000"/>
@@ -1111,8 +1111,8 @@
         </p:nvSpPr>
         <p:spPr>
           <a:xfrm>
-            <a:off x="838200" y="1825625"/>
-            <a:ext cx="5181600" cy="4351338"/>
+            <a:off x="792000" y="1629167"/>
+            <a:ext cx="4896000" cy="3883084"/>
           </a:xfrm>
         </p:spPr>
         <p:txBody>
@@ -1172,8 +1172,8 @@
         </p:nvSpPr>
         <p:spPr>
           <a:xfrm>
-            <a:off x="6172200" y="1825625"/>
-            <a:ext cx="5181600" cy="4351338"/>
+            <a:off x="5832000" y="1629167"/>
+            <a:ext cx="4896000" cy="3883084"/>
           </a:xfrm>
         </p:spPr>
         <p:txBody>
@@ -1321,8 +1321,8 @@
         </p:nvSpPr>
         <p:spPr>
           <a:xfrm>
-            <a:off x="839788" y="365125"/>
-            <a:ext cx="10515600" cy="1325563"/>
+            <a:off x="793500" y="325833"/>
+            <a:ext cx="9936000" cy="1182917"/>
           </a:xfrm>
         </p:spPr>
         <p:txBody>
@@ -1349,8 +1349,8 @@
         </p:nvSpPr>
         <p:spPr>
           <a:xfrm>
-            <a:off x="839788" y="1681163"/>
-            <a:ext cx="5157787" cy="823912"/>
+            <a:off x="793500" y="1500250"/>
+            <a:ext cx="4873500" cy="735250"/>
           </a:xfrm>
         </p:spPr>
         <p:txBody>
@@ -1358,39 +1358,39 @@
           <a:lstStyle>
             <a:lvl1pPr marL="0" indent="0">
               <a:buNone/>
-              <a:defRPr sz="2400" b="1"/>
+              <a:defRPr sz="2140" b="1"/>
             </a:lvl1pPr>
-            <a:lvl2pPr marL="457200" indent="0">
+            <a:lvl2pPr marL="408305" indent="0">
               <a:buNone/>
-              <a:defRPr sz="2000" b="1"/>
+              <a:defRPr sz="1785" b="1"/>
             </a:lvl2pPr>
-            <a:lvl3pPr marL="914400" indent="0">
+            <a:lvl3pPr marL="815975" indent="0">
               <a:buNone/>
-              <a:defRPr sz="1800" b="1"/>
+              <a:defRPr sz="1605" b="1"/>
             </a:lvl3pPr>
-            <a:lvl4pPr marL="1371600" indent="0">
+            <a:lvl4pPr marL="1224280" indent="0">
               <a:buNone/>
-              <a:defRPr sz="1600" b="1"/>
+              <a:defRPr sz="1430" b="1"/>
             </a:lvl4pPr>
-            <a:lvl5pPr marL="1828800" indent="0">
+            <a:lvl5pPr marL="1631950" indent="0">
               <a:buNone/>
-              <a:defRPr sz="1600" b="1"/>
+              <a:defRPr sz="1430" b="1"/>
             </a:lvl5pPr>
-            <a:lvl6pPr marL="2286000" indent="0">
+            <a:lvl6pPr marL="2040255" indent="0">
               <a:buNone/>
-              <a:defRPr sz="1600" b="1"/>
+              <a:defRPr sz="1430" b="1"/>
             </a:lvl6pPr>
-            <a:lvl7pPr marL="2743200" indent="0">
+            <a:lvl7pPr marL="2447925" indent="0">
               <a:buNone/>
-              <a:defRPr sz="1600" b="1"/>
+              <a:defRPr sz="1430" b="1"/>
             </a:lvl7pPr>
-            <a:lvl8pPr marL="3200400" indent="0">
+            <a:lvl8pPr marL="2856230" indent="0">
               <a:buNone/>
-              <a:defRPr sz="1600" b="1"/>
+              <a:defRPr sz="1430" b="1"/>
             </a:lvl8pPr>
-            <a:lvl9pPr marL="3657600" indent="0">
+            <a:lvl9pPr marL="3263900" indent="0">
               <a:buNone/>
-              <a:defRPr sz="1600" b="1"/>
+              <a:defRPr sz="1430" b="1"/>
             </a:lvl9pPr>
           </a:lstStyle>
           <a:p>
@@ -1415,8 +1415,8 @@
         </p:nvSpPr>
         <p:spPr>
           <a:xfrm>
-            <a:off x="839788" y="2505075"/>
-            <a:ext cx="5157787" cy="3684588"/>
+            <a:off x="793500" y="2235500"/>
+            <a:ext cx="4873500" cy="3288084"/>
           </a:xfrm>
         </p:spPr>
         <p:txBody>
@@ -1476,8 +1476,8 @@
         </p:nvSpPr>
         <p:spPr>
           <a:xfrm>
-            <a:off x="6172200" y="1681163"/>
-            <a:ext cx="5183188" cy="823912"/>
+            <a:off x="5832000" y="1500250"/>
+            <a:ext cx="4897501" cy="735250"/>
           </a:xfrm>
         </p:spPr>
         <p:txBody>
@@ -1485,39 +1485,39 @@
           <a:lstStyle>
             <a:lvl1pPr marL="0" indent="0">
               <a:buNone/>
-              <a:defRPr sz="2400" b="1"/>
+              <a:defRPr sz="2140" b="1"/>
             </a:lvl1pPr>
-            <a:lvl2pPr marL="457200" indent="0">
+            <a:lvl2pPr marL="408305" indent="0">
               <a:buNone/>
-              <a:defRPr sz="2000" b="1"/>
+              <a:defRPr sz="1785" b="1"/>
             </a:lvl2pPr>
-            <a:lvl3pPr marL="914400" indent="0">
+            <a:lvl3pPr marL="815975" indent="0">
               <a:buNone/>
-              <a:defRPr sz="1800" b="1"/>
+              <a:defRPr sz="1605" b="1"/>
             </a:lvl3pPr>
-            <a:lvl4pPr marL="1371600" indent="0">
+            <a:lvl4pPr marL="1224280" indent="0">
               <a:buNone/>
-              <a:defRPr sz="1600" b="1"/>
+              <a:defRPr sz="1430" b="1"/>
             </a:lvl4pPr>
-            <a:lvl5pPr marL="1828800" indent="0">
+            <a:lvl5pPr marL="1631950" indent="0">
               <a:buNone/>
-              <a:defRPr sz="1600" b="1"/>
+              <a:defRPr sz="1430" b="1"/>
             </a:lvl5pPr>
-            <a:lvl6pPr marL="2286000" indent="0">
+            <a:lvl6pPr marL="2040255" indent="0">
               <a:buNone/>
-              <a:defRPr sz="1600" b="1"/>
+              <a:defRPr sz="1430" b="1"/>
             </a:lvl6pPr>
-            <a:lvl7pPr marL="2743200" indent="0">
+            <a:lvl7pPr marL="2447925" indent="0">
               <a:buNone/>
-              <a:defRPr sz="1600" b="1"/>
+              <a:defRPr sz="1430" b="1"/>
             </a:lvl7pPr>
-            <a:lvl8pPr marL="3200400" indent="0">
+            <a:lvl8pPr marL="2856230" indent="0">
               <a:buNone/>
-              <a:defRPr sz="1600" b="1"/>
+              <a:defRPr sz="1430" b="1"/>
             </a:lvl8pPr>
-            <a:lvl9pPr marL="3657600" indent="0">
+            <a:lvl9pPr marL="3263900" indent="0">
               <a:buNone/>
-              <a:defRPr sz="1600" b="1"/>
+              <a:defRPr sz="1430" b="1"/>
             </a:lvl9pPr>
           </a:lstStyle>
           <a:p>
@@ -1542,8 +1542,8 @@
         </p:nvSpPr>
         <p:spPr>
           <a:xfrm>
-            <a:off x="6172200" y="2505075"/>
-            <a:ext cx="5183188" cy="3684588"/>
+            <a:off x="5832000" y="2235500"/>
+            <a:ext cx="4897501" cy="3288084"/>
           </a:xfrm>
         </p:spPr>
         <p:txBody>
@@ -1890,15 +1890,15 @@
         </p:nvSpPr>
         <p:spPr>
           <a:xfrm>
-            <a:off x="839788" y="457200"/>
-            <a:ext cx="3932237" cy="1600200"/>
+            <a:off x="793500" y="408000"/>
+            <a:ext cx="3715500" cy="1428000"/>
           </a:xfrm>
         </p:spPr>
         <p:txBody>
           <a:bodyPr anchor="b"/>
           <a:lstStyle>
             <a:lvl1pPr>
-              <a:defRPr sz="3200"/>
+              <a:defRPr sz="2855"/>
             </a:lvl1pPr>
           </a:lstStyle>
           <a:p>
@@ -1922,39 +1922,39 @@
         </p:nvSpPr>
         <p:spPr>
           <a:xfrm>
-            <a:off x="5183188" y="987425"/>
-            <a:ext cx="6172200" cy="4873625"/>
+            <a:off x="4897501" y="881167"/>
+            <a:ext cx="5832000" cy="4349167"/>
           </a:xfrm>
         </p:spPr>
         <p:txBody>
           <a:bodyPr/>
           <a:lstStyle>
             <a:lvl1pPr>
-              <a:defRPr sz="3200"/>
+              <a:defRPr sz="2855"/>
             </a:lvl1pPr>
             <a:lvl2pPr>
-              <a:defRPr sz="2800"/>
+              <a:defRPr sz="2500"/>
             </a:lvl2pPr>
             <a:lvl3pPr>
-              <a:defRPr sz="2400"/>
+              <a:defRPr sz="2140"/>
             </a:lvl3pPr>
             <a:lvl4pPr>
-              <a:defRPr sz="2000"/>
+              <a:defRPr sz="1785"/>
             </a:lvl4pPr>
             <a:lvl5pPr>
-              <a:defRPr sz="2000"/>
+              <a:defRPr sz="1785"/>
             </a:lvl5pPr>
             <a:lvl6pPr>
-              <a:defRPr sz="2000"/>
+              <a:defRPr sz="1785"/>
             </a:lvl6pPr>
             <a:lvl7pPr>
-              <a:defRPr sz="2000"/>
+              <a:defRPr sz="1785"/>
             </a:lvl7pPr>
             <a:lvl8pPr>
-              <a:defRPr sz="2000"/>
+              <a:defRPr sz="1785"/>
             </a:lvl8pPr>
             <a:lvl9pPr>
-              <a:defRPr sz="2000"/>
+              <a:defRPr sz="1785"/>
             </a:lvl9pPr>
           </a:lstStyle>
           <a:p>
@@ -2011,8 +2011,8 @@
         </p:nvSpPr>
         <p:spPr>
           <a:xfrm>
-            <a:off x="839788" y="2057400"/>
-            <a:ext cx="3932237" cy="3811588"/>
+            <a:off x="793500" y="1836000"/>
+            <a:ext cx="3715500" cy="3401417"/>
           </a:xfrm>
         </p:spPr>
         <p:txBody>
@@ -2020,39 +2020,39 @@
           <a:lstStyle>
             <a:lvl1pPr marL="0" indent="0">
               <a:buNone/>
-              <a:defRPr sz="1600"/>
+              <a:defRPr sz="1430"/>
             </a:lvl1pPr>
-            <a:lvl2pPr marL="457200" indent="0">
+            <a:lvl2pPr marL="408305" indent="0">
               <a:buNone/>
-              <a:defRPr sz="1400"/>
+              <a:defRPr sz="1250"/>
             </a:lvl2pPr>
-            <a:lvl3pPr marL="914400" indent="0">
+            <a:lvl3pPr marL="815975" indent="0">
               <a:buNone/>
-              <a:defRPr sz="1200"/>
+              <a:defRPr sz="1070"/>
             </a:lvl3pPr>
-            <a:lvl4pPr marL="1371600" indent="0">
+            <a:lvl4pPr marL="1224280" indent="0">
               <a:buNone/>
-              <a:defRPr sz="1000"/>
+              <a:defRPr sz="890"/>
             </a:lvl4pPr>
-            <a:lvl5pPr marL="1828800" indent="0">
+            <a:lvl5pPr marL="1631950" indent="0">
               <a:buNone/>
-              <a:defRPr sz="1000"/>
+              <a:defRPr sz="890"/>
             </a:lvl5pPr>
-            <a:lvl6pPr marL="2286000" indent="0">
+            <a:lvl6pPr marL="2040255" indent="0">
               <a:buNone/>
-              <a:defRPr sz="1000"/>
+              <a:defRPr sz="890"/>
             </a:lvl6pPr>
-            <a:lvl7pPr marL="2743200" indent="0">
+            <a:lvl7pPr marL="2447925" indent="0">
               <a:buNone/>
-              <a:defRPr sz="1000"/>
+              <a:defRPr sz="890"/>
             </a:lvl7pPr>
-            <a:lvl8pPr marL="3200400" indent="0">
+            <a:lvl8pPr marL="2856230" indent="0">
               <a:buNone/>
-              <a:defRPr sz="1000"/>
+              <a:defRPr sz="890"/>
             </a:lvl8pPr>
-            <a:lvl9pPr marL="3657600" indent="0">
+            <a:lvl9pPr marL="3263900" indent="0">
               <a:buNone/>
-              <a:defRPr sz="1000"/>
+              <a:defRPr sz="890"/>
             </a:lvl9pPr>
           </a:lstStyle>
           <a:p>
@@ -2165,15 +2165,15 @@
         </p:nvSpPr>
         <p:spPr>
           <a:xfrm>
-            <a:off x="839788" y="457200"/>
-            <a:ext cx="3932237" cy="1600200"/>
+            <a:off x="793500" y="408000"/>
+            <a:ext cx="3715500" cy="1428000"/>
           </a:xfrm>
         </p:spPr>
         <p:txBody>
           <a:bodyPr anchor="b"/>
           <a:lstStyle>
             <a:lvl1pPr>
-              <a:defRPr sz="3200"/>
+              <a:defRPr sz="2855"/>
             </a:lvl1pPr>
           </a:lstStyle>
           <a:p>
@@ -2197,8 +2197,8 @@
         </p:nvSpPr>
         <p:spPr>
           <a:xfrm>
-            <a:off x="5183188" y="987425"/>
-            <a:ext cx="6172200" cy="4873625"/>
+            <a:off x="4897501" y="881167"/>
+            <a:ext cx="5832000" cy="4349167"/>
           </a:xfrm>
         </p:spPr>
         <p:txBody>
@@ -2206,39 +2206,39 @@
           <a:lstStyle>
             <a:lvl1pPr marL="0" indent="0">
               <a:buNone/>
-              <a:defRPr sz="3200"/>
+              <a:defRPr sz="2855"/>
             </a:lvl1pPr>
-            <a:lvl2pPr marL="457200" indent="0">
+            <a:lvl2pPr marL="408305" indent="0">
               <a:buNone/>
-              <a:defRPr sz="2800"/>
+              <a:defRPr sz="2500"/>
             </a:lvl2pPr>
-            <a:lvl3pPr marL="914400" indent="0">
+            <a:lvl3pPr marL="815975" indent="0">
               <a:buNone/>
-              <a:defRPr sz="2400"/>
+              <a:defRPr sz="2140"/>
             </a:lvl3pPr>
-            <a:lvl4pPr marL="1371600" indent="0">
+            <a:lvl4pPr marL="1224280" indent="0">
               <a:buNone/>
-              <a:defRPr sz="2000"/>
+              <a:defRPr sz="1785"/>
             </a:lvl4pPr>
-            <a:lvl5pPr marL="1828800" indent="0">
+            <a:lvl5pPr marL="1631950" indent="0">
               <a:buNone/>
-              <a:defRPr sz="2000"/>
+              <a:defRPr sz="1785"/>
             </a:lvl5pPr>
-            <a:lvl6pPr marL="2286000" indent="0">
+            <a:lvl6pPr marL="2040255" indent="0">
               <a:buNone/>
-              <a:defRPr sz="2000"/>
+              <a:defRPr sz="1785"/>
             </a:lvl6pPr>
-            <a:lvl7pPr marL="2743200" indent="0">
+            <a:lvl7pPr marL="2447925" indent="0">
               <a:buNone/>
-              <a:defRPr sz="2000"/>
+              <a:defRPr sz="1785"/>
             </a:lvl7pPr>
-            <a:lvl8pPr marL="3200400" indent="0">
+            <a:lvl8pPr marL="2856230" indent="0">
               <a:buNone/>
-              <a:defRPr sz="2000"/>
+              <a:defRPr sz="1785"/>
             </a:lvl8pPr>
-            <a:lvl9pPr marL="3657600" indent="0">
+            <a:lvl9pPr marL="3263900" indent="0">
               <a:buNone/>
-              <a:defRPr sz="2000"/>
+              <a:defRPr sz="1785"/>
             </a:lvl9pPr>
           </a:lstStyle>
           <a:p>
@@ -2258,8 +2258,8 @@
         </p:nvSpPr>
         <p:spPr>
           <a:xfrm>
-            <a:off x="839788" y="2057400"/>
-            <a:ext cx="3932237" cy="3811588"/>
+            <a:off x="793500" y="1836000"/>
+            <a:ext cx="3715500" cy="3401417"/>
           </a:xfrm>
         </p:spPr>
         <p:txBody>
@@ -2267,39 +2267,39 @@
           <a:lstStyle>
             <a:lvl1pPr marL="0" indent="0">
               <a:buNone/>
-              <a:defRPr sz="1600"/>
+              <a:defRPr sz="1430"/>
             </a:lvl1pPr>
-            <a:lvl2pPr marL="457200" indent="0">
+            <a:lvl2pPr marL="408305" indent="0">
               <a:buNone/>
-              <a:defRPr sz="1400"/>
+              <a:defRPr sz="1250"/>
             </a:lvl2pPr>
-            <a:lvl3pPr marL="914400" indent="0">
+            <a:lvl3pPr marL="815975" indent="0">
               <a:buNone/>
-              <a:defRPr sz="1200"/>
+              <a:defRPr sz="1070"/>
             </a:lvl3pPr>
-            <a:lvl4pPr marL="1371600" indent="0">
+            <a:lvl4pPr marL="1224280" indent="0">
               <a:buNone/>
-              <a:defRPr sz="1000"/>
+              <a:defRPr sz="890"/>
             </a:lvl4pPr>
-            <a:lvl5pPr marL="1828800" indent="0">
+            <a:lvl5pPr marL="1631950" indent="0">
               <a:buNone/>
-              <a:defRPr sz="1000"/>
+              <a:defRPr sz="890"/>
             </a:lvl5pPr>
-            <a:lvl6pPr marL="2286000" indent="0">
+            <a:lvl6pPr marL="2040255" indent="0">
               <a:buNone/>
-              <a:defRPr sz="1000"/>
+              <a:defRPr sz="890"/>
             </a:lvl6pPr>
-            <a:lvl7pPr marL="2743200" indent="0">
+            <a:lvl7pPr marL="2447925" indent="0">
               <a:buNone/>
-              <a:defRPr sz="1000"/>
+              <a:defRPr sz="890"/>
             </a:lvl7pPr>
-            <a:lvl8pPr marL="3200400" indent="0">
+            <a:lvl8pPr marL="2856230" indent="0">
               <a:buNone/>
-              <a:defRPr sz="1000"/>
+              <a:defRPr sz="890"/>
             </a:lvl8pPr>
-            <a:lvl9pPr marL="3657600" indent="0">
+            <a:lvl9pPr marL="3263900" indent="0">
               <a:buNone/>
-              <a:defRPr sz="1000"/>
+              <a:defRPr sz="890"/>
             </a:lvl9pPr>
           </a:lstStyle>
           <a:p>
@@ -2417,8 +2417,8 @@
         </p:nvSpPr>
         <p:spPr>
           <a:xfrm>
-            <a:off x="838200" y="365125"/>
-            <a:ext cx="10515600" cy="1325563"/>
+            <a:off x="792000" y="325833"/>
+            <a:ext cx="9936000" cy="1182917"/>
           </a:xfrm>
           <a:prstGeom prst="rect">
             <a:avLst/>
@@ -2450,8 +2450,8 @@
         </p:nvSpPr>
         <p:spPr>
           <a:xfrm>
-            <a:off x="838200" y="1825625"/>
-            <a:ext cx="10515600" cy="4351338"/>
+            <a:off x="792000" y="1629167"/>
+            <a:ext cx="9936000" cy="3883084"/>
           </a:xfrm>
           <a:prstGeom prst="rect">
             <a:avLst/>
@@ -2516,8 +2516,8 @@
         </p:nvSpPr>
         <p:spPr>
           <a:xfrm>
-            <a:off x="838200" y="6356350"/>
-            <a:ext cx="2743200" cy="365125"/>
+            <a:off x="792000" y="5672333"/>
+            <a:ext cx="2592000" cy="325833"/>
           </a:xfrm>
           <a:prstGeom prst="rect">
             <a:avLst/>
@@ -2527,7 +2527,7 @@
           <a:bodyPr vert="horz" lIns="91440" tIns="45720" rIns="91440" bIns="45720" rtlCol="0" anchor="ctr"/>
           <a:lstStyle>
             <a:lvl1pPr algn="l">
-              <a:defRPr sz="1200">
+              <a:defRPr sz="1070">
                 <a:solidFill>
                   <a:schemeClr val="tx1">
                     <a:tint val="75000"/>
@@ -2556,8 +2556,8 @@
         </p:nvSpPr>
         <p:spPr>
           <a:xfrm>
-            <a:off x="4038600" y="6356350"/>
-            <a:ext cx="4114800" cy="365125"/>
+            <a:off x="3816000" y="5672333"/>
+            <a:ext cx="3888000" cy="325833"/>
           </a:xfrm>
           <a:prstGeom prst="rect">
             <a:avLst/>
@@ -2567,7 +2567,7 @@
           <a:bodyPr vert="horz" lIns="91440" tIns="45720" rIns="91440" bIns="45720" rtlCol="0" anchor="ctr"/>
           <a:lstStyle>
             <a:lvl1pPr algn="ctr">
-              <a:defRPr sz="1200">
+              <a:defRPr sz="1070">
                 <a:solidFill>
                   <a:schemeClr val="tx1">
                     <a:tint val="75000"/>
@@ -2593,8 +2593,8 @@
         </p:nvSpPr>
         <p:spPr>
           <a:xfrm>
-            <a:off x="8610600" y="6356350"/>
-            <a:ext cx="2743200" cy="365125"/>
+            <a:off x="8136000" y="5672333"/>
+            <a:ext cx="2592000" cy="325833"/>
           </a:xfrm>
           <a:prstGeom prst="rect">
             <a:avLst/>
@@ -2604,7 +2604,7 @@
           <a:bodyPr vert="horz" lIns="91440" tIns="45720" rIns="91440" bIns="45720" rtlCol="0" anchor="ctr"/>
           <a:lstStyle>
             <a:lvl1pPr algn="r">
-              <a:defRPr sz="1200">
+              <a:defRPr sz="1070">
                 <a:solidFill>
                   <a:schemeClr val="tx1">
                     <a:tint val="75000"/>
@@ -2639,7 +2639,7 @@
   </p:sldLayoutIdLst>
   <p:txStyles>
     <p:titleStyle>
-      <a:lvl1pPr algn="l" defTabSz="914400" rtl="0" eaLnBrk="1" latinLnBrk="0" hangingPunct="1">
+      <a:lvl1pPr algn="l" defTabSz="815975" rtl="0" eaLnBrk="1" latinLnBrk="0" hangingPunct="1">
         <a:lnSpc>
           <a:spcPct val="90000"/>
         </a:lnSpc>
@@ -2647,7 +2647,7 @@
           <a:spcPct val="0"/>
         </a:spcBef>
         <a:buNone/>
-        <a:defRPr sz="4400" kern="1200">
+        <a:defRPr sz="3925" kern="1200">
           <a:solidFill>
             <a:schemeClr val="tx1"/>
           </a:solidFill>
@@ -2658,16 +2658,16 @@
       </a:lvl1pPr>
     </p:titleStyle>
     <p:bodyStyle>
-      <a:lvl1pPr marL="228600" indent="-228600" algn="l" defTabSz="914400" rtl="0" eaLnBrk="1" latinLnBrk="0" hangingPunct="1">
+      <a:lvl1pPr marL="203835" indent="-203835" algn="l" defTabSz="815975" rtl="0" eaLnBrk="1" latinLnBrk="0" hangingPunct="1">
         <a:lnSpc>
           <a:spcPct val="90000"/>
         </a:lnSpc>
         <a:spcBef>
-          <a:spcPts val="1000"/>
+          <a:spcPct val="179000"/>
         </a:spcBef>
         <a:buFont typeface="Arial" panose="020B0604020202020204" pitchFamily="34" charset="0"/>
         <a:buChar char="•"/>
-        <a:defRPr sz="2800" kern="1200">
+        <a:defRPr sz="2500" kern="1200">
           <a:solidFill>
             <a:schemeClr val="tx1"/>
           </a:solidFill>
@@ -2676,16 +2676,16 @@
           <a:cs typeface="+mn-cs"/>
         </a:defRPr>
       </a:lvl1pPr>
-      <a:lvl2pPr marL="685800" indent="-228600" algn="l" defTabSz="914400" rtl="0" eaLnBrk="1" latinLnBrk="0" hangingPunct="1">
+      <a:lvl2pPr marL="612140" indent="-203835" algn="l" defTabSz="815975" rtl="0" eaLnBrk="1" latinLnBrk="0" hangingPunct="1">
         <a:lnSpc>
           <a:spcPct val="90000"/>
         </a:lnSpc>
         <a:spcBef>
-          <a:spcPts val="500"/>
+          <a:spcPts val="445"/>
         </a:spcBef>
         <a:buFont typeface="Arial" panose="020B0604020202020204" pitchFamily="34" charset="0"/>
         <a:buChar char="•"/>
-        <a:defRPr sz="2400" kern="1200">
+        <a:defRPr sz="2140" kern="1200">
           <a:solidFill>
             <a:schemeClr val="tx1"/>
           </a:solidFill>
@@ -2694,16 +2694,16 @@
           <a:cs typeface="+mn-cs"/>
         </a:defRPr>
       </a:lvl2pPr>
-      <a:lvl3pPr marL="1143000" indent="-228600" algn="l" defTabSz="914400" rtl="0" eaLnBrk="1" latinLnBrk="0" hangingPunct="1">
+      <a:lvl3pPr marL="1019810" indent="-203835" algn="l" defTabSz="815975" rtl="0" eaLnBrk="1" latinLnBrk="0" hangingPunct="1">
         <a:lnSpc>
           <a:spcPct val="90000"/>
         </a:lnSpc>
         <a:spcBef>
-          <a:spcPts val="500"/>
+          <a:spcPts val="445"/>
         </a:spcBef>
         <a:buFont typeface="Arial" panose="020B0604020202020204" pitchFamily="34" charset="0"/>
         <a:buChar char="•"/>
-        <a:defRPr sz="2000" kern="1200">
+        <a:defRPr sz="1785" kern="1200">
           <a:solidFill>
             <a:schemeClr val="tx1"/>
           </a:solidFill>
@@ -2712,16 +2712,16 @@
           <a:cs typeface="+mn-cs"/>
         </a:defRPr>
       </a:lvl3pPr>
-      <a:lvl4pPr marL="1600200" indent="-228600" algn="l" defTabSz="914400" rtl="0" eaLnBrk="1" latinLnBrk="0" hangingPunct="1">
+      <a:lvl4pPr marL="1428115" indent="-203835" algn="l" defTabSz="815975" rtl="0" eaLnBrk="1" latinLnBrk="0" hangingPunct="1">
         <a:lnSpc>
           <a:spcPct val="90000"/>
         </a:lnSpc>
         <a:spcBef>
-          <a:spcPts val="500"/>
+          <a:spcPts val="445"/>
         </a:spcBef>
         <a:buFont typeface="Arial" panose="020B0604020202020204" pitchFamily="34" charset="0"/>
         <a:buChar char="•"/>
-        <a:defRPr sz="1800" kern="1200">
+        <a:defRPr sz="1605" kern="1200">
           <a:solidFill>
             <a:schemeClr val="tx1"/>
           </a:solidFill>
@@ -2730,16 +2730,16 @@
           <a:cs typeface="+mn-cs"/>
         </a:defRPr>
       </a:lvl4pPr>
-      <a:lvl5pPr marL="2057400" indent="-228600" algn="l" defTabSz="914400" rtl="0" eaLnBrk="1" latinLnBrk="0" hangingPunct="1">
+      <a:lvl5pPr marL="1835785" indent="-203835" algn="l" defTabSz="815975" rtl="0" eaLnBrk="1" latinLnBrk="0" hangingPunct="1">
         <a:lnSpc>
           <a:spcPct val="90000"/>
         </a:lnSpc>
         <a:spcBef>
-          <a:spcPts val="500"/>
+          <a:spcPts val="445"/>
         </a:spcBef>
         <a:buFont typeface="Arial" panose="020B0604020202020204" pitchFamily="34" charset="0"/>
         <a:buChar char="•"/>
-        <a:defRPr sz="1800" kern="1200">
+        <a:defRPr sz="1605" kern="1200">
           <a:solidFill>
             <a:schemeClr val="tx1"/>
           </a:solidFill>
@@ -2748,16 +2748,16 @@
           <a:cs typeface="+mn-cs"/>
         </a:defRPr>
       </a:lvl5pPr>
-      <a:lvl6pPr marL="2514600" indent="-228600" algn="l" defTabSz="914400" rtl="0" eaLnBrk="1" latinLnBrk="0" hangingPunct="1">
+      <a:lvl6pPr marL="2244090" indent="-203835" algn="l" defTabSz="815975" rtl="0" eaLnBrk="1" latinLnBrk="0" hangingPunct="1">
         <a:lnSpc>
           <a:spcPct val="90000"/>
         </a:lnSpc>
         <a:spcBef>
-          <a:spcPts val="500"/>
+          <a:spcPts val="445"/>
         </a:spcBef>
         <a:buFont typeface="Arial" panose="020B0604020202020204" pitchFamily="34" charset="0"/>
         <a:buChar char="•"/>
-        <a:defRPr sz="1800" kern="1200">
+        <a:defRPr sz="1605" kern="1200">
           <a:solidFill>
             <a:schemeClr val="tx1"/>
           </a:solidFill>
@@ -2766,16 +2766,16 @@
           <a:cs typeface="+mn-cs"/>
         </a:defRPr>
       </a:lvl6pPr>
-      <a:lvl7pPr marL="2971800" indent="-228600" algn="l" defTabSz="914400" rtl="0" eaLnBrk="1" latinLnBrk="0" hangingPunct="1">
+      <a:lvl7pPr marL="2651760" indent="-203835" algn="l" defTabSz="815975" rtl="0" eaLnBrk="1" latinLnBrk="0" hangingPunct="1">
         <a:lnSpc>
           <a:spcPct val="90000"/>
         </a:lnSpc>
         <a:spcBef>
-          <a:spcPts val="500"/>
+          <a:spcPts val="445"/>
         </a:spcBef>
         <a:buFont typeface="Arial" panose="020B0604020202020204" pitchFamily="34" charset="0"/>
         <a:buChar char="•"/>
-        <a:defRPr sz="1800" kern="1200">
+        <a:defRPr sz="1605" kern="1200">
           <a:solidFill>
             <a:schemeClr val="tx1"/>
           </a:solidFill>
@@ -2784,16 +2784,16 @@
           <a:cs typeface="+mn-cs"/>
         </a:defRPr>
       </a:lvl7pPr>
-      <a:lvl8pPr marL="3429000" indent="-228600" algn="l" defTabSz="914400" rtl="0" eaLnBrk="1" latinLnBrk="0" hangingPunct="1">
+      <a:lvl8pPr marL="3060065" indent="-203835" algn="l" defTabSz="815975" rtl="0" eaLnBrk="1" latinLnBrk="0" hangingPunct="1">
         <a:lnSpc>
           <a:spcPct val="90000"/>
         </a:lnSpc>
         <a:spcBef>
-          <a:spcPts val="500"/>
+          <a:spcPts val="445"/>
         </a:spcBef>
         <a:buFont typeface="Arial" panose="020B0604020202020204" pitchFamily="34" charset="0"/>
         <a:buChar char="•"/>
-        <a:defRPr sz="1800" kern="1200">
+        <a:defRPr sz="1605" kern="1200">
           <a:solidFill>
             <a:schemeClr val="tx1"/>
           </a:solidFill>
@@ -2802,16 +2802,16 @@
           <a:cs typeface="+mn-cs"/>
         </a:defRPr>
       </a:lvl8pPr>
-      <a:lvl9pPr marL="3886200" indent="-228600" algn="l" defTabSz="914400" rtl="0" eaLnBrk="1" latinLnBrk="0" hangingPunct="1">
+      <a:lvl9pPr marL="3467735" indent="-203835" algn="l" defTabSz="815975" rtl="0" eaLnBrk="1" latinLnBrk="0" hangingPunct="1">
         <a:lnSpc>
           <a:spcPct val="90000"/>
         </a:lnSpc>
         <a:spcBef>
-          <a:spcPts val="500"/>
+          <a:spcPts val="445"/>
         </a:spcBef>
         <a:buFont typeface="Arial" panose="020B0604020202020204" pitchFamily="34" charset="0"/>
         <a:buChar char="•"/>
-        <a:defRPr sz="1800" kern="1200">
+        <a:defRPr sz="1605" kern="1200">
           <a:solidFill>
             <a:schemeClr val="tx1"/>
           </a:solidFill>
@@ -2825,8 +2825,8 @@
       <a:defPPr>
         <a:defRPr lang="zh-CN"/>
       </a:defPPr>
-      <a:lvl1pPr marL="0" algn="l" defTabSz="914400" rtl="0" eaLnBrk="1" latinLnBrk="0" hangingPunct="1">
-        <a:defRPr sz="1800" kern="1200">
+      <a:lvl1pPr marL="0" algn="l" defTabSz="815975" rtl="0" eaLnBrk="1" latinLnBrk="0" hangingPunct="1">
+        <a:defRPr sz="1605" kern="1200">
           <a:solidFill>
             <a:schemeClr val="tx1"/>
           </a:solidFill>
@@ -2835,8 +2835,8 @@
           <a:cs typeface="+mn-cs"/>
         </a:defRPr>
       </a:lvl1pPr>
-      <a:lvl2pPr marL="457200" algn="l" defTabSz="914400" rtl="0" eaLnBrk="1" latinLnBrk="0" hangingPunct="1">
-        <a:defRPr sz="1800" kern="1200">
+      <a:lvl2pPr marL="408305" algn="l" defTabSz="815975" rtl="0" eaLnBrk="1" latinLnBrk="0" hangingPunct="1">
+        <a:defRPr sz="1605" kern="1200">
           <a:solidFill>
             <a:schemeClr val="tx1"/>
           </a:solidFill>
@@ -2845,8 +2845,8 @@
           <a:cs typeface="+mn-cs"/>
         </a:defRPr>
       </a:lvl2pPr>
-      <a:lvl3pPr marL="914400" algn="l" defTabSz="914400" rtl="0" eaLnBrk="1" latinLnBrk="0" hangingPunct="1">
-        <a:defRPr sz="1800" kern="1200">
+      <a:lvl3pPr marL="815975" algn="l" defTabSz="815975" rtl="0" eaLnBrk="1" latinLnBrk="0" hangingPunct="1">
+        <a:defRPr sz="1605" kern="1200">
           <a:solidFill>
             <a:schemeClr val="tx1"/>
           </a:solidFill>
@@ -2855,8 +2855,8 @@
           <a:cs typeface="+mn-cs"/>
         </a:defRPr>
       </a:lvl3pPr>
-      <a:lvl4pPr marL="1371600" algn="l" defTabSz="914400" rtl="0" eaLnBrk="1" latinLnBrk="0" hangingPunct="1">
-        <a:defRPr sz="1800" kern="1200">
+      <a:lvl4pPr marL="1224280" algn="l" defTabSz="815975" rtl="0" eaLnBrk="1" latinLnBrk="0" hangingPunct="1">
+        <a:defRPr sz="1605" kern="1200">
           <a:solidFill>
             <a:schemeClr val="tx1"/>
           </a:solidFill>
@@ -2865,8 +2865,8 @@
           <a:cs typeface="+mn-cs"/>
         </a:defRPr>
       </a:lvl4pPr>
-      <a:lvl5pPr marL="1828800" algn="l" defTabSz="914400" rtl="0" eaLnBrk="1" latinLnBrk="0" hangingPunct="1">
-        <a:defRPr sz="1800" kern="1200">
+      <a:lvl5pPr marL="1631950" algn="l" defTabSz="815975" rtl="0" eaLnBrk="1" latinLnBrk="0" hangingPunct="1">
+        <a:defRPr sz="1605" kern="1200">
           <a:solidFill>
             <a:schemeClr val="tx1"/>
           </a:solidFill>
@@ -2875,8 +2875,8 @@
           <a:cs typeface="+mn-cs"/>
         </a:defRPr>
       </a:lvl5pPr>
-      <a:lvl6pPr marL="2286000" algn="l" defTabSz="914400" rtl="0" eaLnBrk="1" latinLnBrk="0" hangingPunct="1">
-        <a:defRPr sz="1800" kern="1200">
+      <a:lvl6pPr marL="2040255" algn="l" defTabSz="815975" rtl="0" eaLnBrk="1" latinLnBrk="0" hangingPunct="1">
+        <a:defRPr sz="1605" kern="1200">
           <a:solidFill>
             <a:schemeClr val="tx1"/>
           </a:solidFill>
@@ -2885,8 +2885,8 @@
           <a:cs typeface="+mn-cs"/>
         </a:defRPr>
       </a:lvl6pPr>
-      <a:lvl7pPr marL="2743200" algn="l" defTabSz="914400" rtl="0" eaLnBrk="1" latinLnBrk="0" hangingPunct="1">
-        <a:defRPr sz="1800" kern="1200">
+      <a:lvl7pPr marL="2447925" algn="l" defTabSz="815975" rtl="0" eaLnBrk="1" latinLnBrk="0" hangingPunct="1">
+        <a:defRPr sz="1605" kern="1200">
           <a:solidFill>
             <a:schemeClr val="tx1"/>
           </a:solidFill>
@@ -2895,8 +2895,8 @@
           <a:cs typeface="+mn-cs"/>
         </a:defRPr>
       </a:lvl7pPr>
-      <a:lvl8pPr marL="3200400" algn="l" defTabSz="914400" rtl="0" eaLnBrk="1" latinLnBrk="0" hangingPunct="1">
-        <a:defRPr sz="1800" kern="1200">
+      <a:lvl8pPr marL="2856230" algn="l" defTabSz="815975" rtl="0" eaLnBrk="1" latinLnBrk="0" hangingPunct="1">
+        <a:defRPr sz="1605" kern="1200">
           <a:solidFill>
             <a:schemeClr val="tx1"/>
           </a:solidFill>
@@ -2905,8 +2905,8 @@
           <a:cs typeface="+mn-cs"/>
         </a:defRPr>
       </a:lvl8pPr>
-      <a:lvl9pPr marL="3657600" algn="l" defTabSz="914400" rtl="0" eaLnBrk="1" latinLnBrk="0" hangingPunct="1">
-        <a:defRPr sz="1800" kern="1200">
+      <a:lvl9pPr marL="3263900" algn="l" defTabSz="815975" rtl="0" eaLnBrk="1" latinLnBrk="0" hangingPunct="1">
+        <a:defRPr sz="1605" kern="1200">
           <a:solidFill>
             <a:schemeClr val="tx1"/>
           </a:solidFill>
@@ -2932,27 +2932,34 @@
       <p:grpSpPr/>
       <p:sp>
         <p:nvSpPr>
-          <p:cNvPr id="48" name="矩形 47"/>
+          <p:cNvPr id="40" name="矩形 39"/>
           <p:cNvSpPr/>
           <p:nvPr/>
         </p:nvSpPr>
         <p:spPr>
           <a:xfrm>
-            <a:off x="9248140" y="725170"/>
+            <a:off x="9072245" y="125095"/>
             <a:ext cx="2261870" cy="5957570"/>
           </a:xfrm>
           <a:prstGeom prst="rect">
             <a:avLst/>
           </a:prstGeom>
-          <a:solidFill>
-            <a:srgbClr val="EFEFEF"/>
-          </a:solidFill>
+          <a:noFill/>
           <a:ln>
             <a:solidFill>
               <a:schemeClr val="tx1"/>
             </a:solidFill>
-            <a:prstDash val="sysDash"/>
+            <a:prstDash val="solid"/>
           </a:ln>
+          <a:extLst>
+            <a:ext uri="{909E8E84-426E-40DD-AFC4-6F175D3DCCD1}">
+              <a14:hiddenFill xmlns:a14="http://schemas.microsoft.com/office/drawing/2010/main">
+                <a:solidFill>
+                  <a:srgbClr val="EFEFEF"/>
+                </a:solidFill>
+              </a14:hiddenFill>
+            </a:ext>
+          </a:extLst>
         </p:spPr>
         <p:style>
           <a:lnRef idx="2">
@@ -2974,33 +2981,43 @@
           <a:bodyPr rtlCol="0" anchor="ctr"/>
           <a:p>
             <a:pPr algn="ctr"/>
-            <a:endParaRPr lang="zh-CN" altLang="en-US" b="1"/>
-          </a:p>
-        </p:txBody>
-      </p:sp>
-      <p:sp>
-        <p:nvSpPr>
-          <p:cNvPr id="49" name="矩形 48"/>
+            <a:endParaRPr lang="zh-CN" altLang="en-US"/>
+          </a:p>
+        </p:txBody>
+      </p:sp>
+      <p:sp>
+        <p:nvSpPr>
+          <p:cNvPr id="41" name="矩形 40"/>
           <p:cNvSpPr/>
           <p:nvPr/>
         </p:nvSpPr>
         <p:spPr>
           <a:xfrm>
-            <a:off x="261620" y="688975"/>
+            <a:off x="85725" y="88900"/>
             <a:ext cx="2261870" cy="5957570"/>
           </a:xfrm>
           <a:prstGeom prst="rect">
             <a:avLst/>
           </a:prstGeom>
-          <a:solidFill>
-            <a:srgbClr val="EFEFEF"/>
-          </a:solidFill>
+          <a:noFill/>
           <a:ln>
             <a:solidFill>
               <a:schemeClr val="tx1"/>
             </a:solidFill>
-            <a:prstDash val="sysDash"/>
+            <a:prstDash val="solid"/>
           </a:ln>
+          <a:extLst>
+            <a:ext uri="{909E8E84-426E-40DD-AFC4-6F175D3DCCD1}">
+              <a14:hiddenFill xmlns:a14="http://schemas.microsoft.com/office/drawing/2010/main">
+                <a:solidFill>
+                  <a:schemeClr val="accent1">
+                    <a:lumMod val="20000"/>
+                    <a:lumOff val="80000"/>
+                  </a:schemeClr>
+                </a:solidFill>
+              </a14:hiddenFill>
+            </a:ext>
+          </a:extLst>
         </p:spPr>
         <p:style>
           <a:lnRef idx="2">
@@ -3022,20 +3039,20 @@
           <a:bodyPr rtlCol="0" anchor="ctr"/>
           <a:p>
             <a:pPr algn="ctr"/>
-            <a:endParaRPr lang="zh-CN" altLang="en-US" b="1"/>
-          </a:p>
-        </p:txBody>
-      </p:sp>
-      <p:sp>
-        <p:nvSpPr>
-          <p:cNvPr id="50" name="矩形 49"/>
+            <a:endParaRPr lang="zh-CN" altLang="en-US"/>
+          </a:p>
+        </p:txBody>
+      </p:sp>
+      <p:sp>
+        <p:nvSpPr>
+          <p:cNvPr id="42" name="矩形 41"/>
           <p:cNvSpPr/>
           <p:nvPr/>
         </p:nvSpPr>
         <p:spPr>
           <a:xfrm>
-            <a:off x="421640" y="1486535"/>
-            <a:ext cx="1987550" cy="459740"/>
+            <a:off x="191770" y="505460"/>
+            <a:ext cx="2023110" cy="459740"/>
           </a:xfrm>
           <a:prstGeom prst="rect">
             <a:avLst/>
@@ -3064,30 +3081,110 @@
           </a:fontRef>
         </p:style>
         <p:txBody>
+          <a:bodyPr vertOverflow="overflow" horzOverflow="overflow" vert="horz" wrap="square" numCol="1" spcCol="0" rtlCol="0" fromWordArt="0" anchor="ctr" anchorCtr="0" forceAA="0" compatLnSpc="1">
+            <a:noAutofit/>
+          </a:bodyPr>
+          <a:p>
+            <a:pPr lvl="0" algn="ctr">
+              <a:buClrTx/>
+              <a:buSzTx/>
+              <a:buFontTx/>
+            </a:pPr>
+            <a:r>
+              <a:rPr lang="en-US" altLang="zh-CN" sz="1600">
+                <a:solidFill>
+                  <a:schemeClr val="tx1"/>
+                </a:solidFill>
+                <a:latin typeface="宋体" panose="02010600030101010101" pitchFamily="2" charset="-122"/>
+                <a:ea typeface="宋体" panose="02010600030101010101" pitchFamily="2" charset="-122"/>
+                <a:sym typeface="+mn-ea"/>
+              </a:rPr>
+              <a:t>      </a:t>
+            </a:r>
+            <a:r>
+              <a:rPr lang="en-US" altLang="zh-CN" sz="1600">
+                <a:solidFill>
+                  <a:schemeClr val="tx1"/>
+                </a:solidFill>
+                <a:latin typeface="宋体" panose="02010600030101010101" pitchFamily="2" charset="-122"/>
+                <a:ea typeface="宋体" panose="02010600030101010101" pitchFamily="2" charset="-122"/>
+                <a:sym typeface="+mn-ea"/>
+              </a:rPr>
+              <a:t>眼动追踪数据</a:t>
+            </a:r>
+            <a:endParaRPr lang="en-US" altLang="zh-CN" sz="1600">
+              <a:solidFill>
+                <a:schemeClr val="tx1"/>
+              </a:solidFill>
+              <a:latin typeface="宋体" panose="02010600030101010101" pitchFamily="2" charset="-122"/>
+              <a:ea typeface="宋体" panose="02010600030101010101" pitchFamily="2" charset="-122"/>
+              <a:sym typeface="+mn-ea"/>
+            </a:endParaRPr>
+          </a:p>
+        </p:txBody>
+      </p:sp>
+      <p:sp>
+        <p:nvSpPr>
+          <p:cNvPr id="45" name="矩形 44"/>
+          <p:cNvSpPr/>
+          <p:nvPr/>
+        </p:nvSpPr>
+        <p:spPr>
+          <a:xfrm>
+            <a:off x="191770" y="965200"/>
+            <a:ext cx="2023110" cy="586105"/>
+          </a:xfrm>
+          <a:prstGeom prst="rect">
+            <a:avLst/>
+          </a:prstGeom>
+          <a:solidFill>
+            <a:srgbClr val="FFFFFF"/>
+          </a:solidFill>
+          <a:ln>
+            <a:solidFill>
+              <a:srgbClr val="BDD6EC"/>
+            </a:solidFill>
+          </a:ln>
+        </p:spPr>
+        <p:style>
+          <a:lnRef idx="0">
+            <a:srgbClr val="FFFFFF"/>
+          </a:lnRef>
+          <a:fillRef idx="1">
+            <a:schemeClr val="accent1"/>
+          </a:fillRef>
+          <a:effectRef idx="0">
+            <a:srgbClr val="FFFFFF"/>
+          </a:effectRef>
+          <a:fontRef idx="minor">
+            <a:schemeClr val="lt1"/>
+          </a:fontRef>
+        </p:style>
+        <p:txBody>
           <a:bodyPr rtlCol="0" anchor="ctr"/>
           <a:p>
             <a:pPr algn="l"/>
             <a:r>
-              <a:rPr lang="en-US" altLang="zh-CN" sz="1400" b="1">
+              <a:rPr lang="en-US" altLang="zh-CN" sz="1500">
                 <a:solidFill>
                   <a:schemeClr val="tx1"/>
                 </a:solidFill>
                 <a:latin typeface="宋体" panose="02010600030101010101" pitchFamily="2" charset="-122"/>
                 <a:ea typeface="宋体" panose="02010600030101010101" pitchFamily="2" charset="-122"/>
               </a:rPr>
-              <a:t>      </a:t>
-            </a:r>
-            <a:r>
-              <a:rPr lang="zh-CN" altLang="en-US" sz="1400" b="1">
+              <a:t>·</a:t>
+            </a:r>
+            <a:r>
+              <a:rPr lang="zh-CN" altLang="en-US" sz="1500">
                 <a:solidFill>
                   <a:schemeClr val="tx1"/>
                 </a:solidFill>
                 <a:latin typeface="宋体" panose="02010600030101010101" pitchFamily="2" charset="-122"/>
                 <a:ea typeface="宋体" panose="02010600030101010101" pitchFamily="2" charset="-122"/>
               </a:rPr>
-              <a:t>动画网格</a:t>
-            </a:r>
-            <a:endParaRPr lang="zh-CN" altLang="en-US" sz="1400" b="1">
+              <a:t>注视点坐标</a:t>
+            </a:r>
+            <a:endParaRPr lang="zh-CN" altLang="en-US" sz="1500">
               <a:solidFill>
                 <a:schemeClr val="tx1"/>
               </a:solidFill>
@@ -3095,18 +3192,49 @@
               <a:ea typeface="宋体" panose="02010600030101010101" pitchFamily="2" charset="-122"/>
             </a:endParaRPr>
           </a:p>
-        </p:txBody>
-      </p:sp>
-      <p:sp>
-        <p:nvSpPr>
-          <p:cNvPr id="52" name="矩形 51"/>
+          <a:p>
+            <a:pPr algn="l"/>
+            <a:r>
+              <a:rPr lang="en-US" altLang="zh-CN" sz="1500">
+                <a:solidFill>
+                  <a:schemeClr val="tx1"/>
+                </a:solidFill>
+                <a:latin typeface="宋体" panose="02010600030101010101" pitchFamily="2" charset="-122"/>
+                <a:ea typeface="宋体" panose="02010600030101010101" pitchFamily="2" charset="-122"/>
+                <a:sym typeface="+mn-ea"/>
+              </a:rPr>
+              <a:t>·</a:t>
+            </a:r>
+            <a:r>
+              <a:rPr lang="zh-CN" altLang="en-US" sz="1500">
+                <a:solidFill>
+                  <a:schemeClr val="tx1"/>
+                </a:solidFill>
+                <a:latin typeface="宋体" panose="02010600030101010101" pitchFamily="2" charset="-122"/>
+                <a:ea typeface="宋体" panose="02010600030101010101" pitchFamily="2" charset="-122"/>
+              </a:rPr>
+              <a:t>眼球角速度</a:t>
+            </a:r>
+            <a:endParaRPr lang="zh-CN" altLang="en-US" sz="1500">
+              <a:solidFill>
+                <a:schemeClr val="tx1"/>
+              </a:solidFill>
+              <a:latin typeface="宋体" panose="02010600030101010101" pitchFamily="2" charset="-122"/>
+              <a:ea typeface="宋体" panose="02010600030101010101" pitchFamily="2" charset="-122"/>
+            </a:endParaRPr>
+          </a:p>
+        </p:txBody>
+      </p:sp>
+      <p:sp>
+        <p:nvSpPr>
+          <p:cNvPr id="46" name="矩形 45"/>
           <p:cNvSpPr/>
           <p:nvPr/>
         </p:nvSpPr>
         <p:spPr>
           <a:xfrm>
-            <a:off x="419735" y="2320925"/>
-            <a:ext cx="1986915" cy="459740"/>
+            <a:off x="191770" y="1624965"/>
+            <a:ext cx="2023110" cy="459740"/>
           </a:xfrm>
           <a:prstGeom prst="rect">
             <a:avLst/>
@@ -3139,16 +3267,26 @@
           <a:p>
             <a:pPr algn="ctr"/>
             <a:r>
-              <a:rPr lang="zh-CN" sz="1400" b="1">
+              <a:rPr lang="en-US" altLang="zh-CN" sz="1600">
                 <a:solidFill>
                   <a:schemeClr val="tx1"/>
                 </a:solidFill>
                 <a:latin typeface="宋体" panose="02010600030101010101" pitchFamily="2" charset="-122"/>
                 <a:ea typeface="宋体" panose="02010600030101010101" pitchFamily="2" charset="-122"/>
               </a:rPr>
-              <a:t>实时注视点</a:t>
-            </a:r>
-            <a:endParaRPr lang="zh-CN" sz="1400" b="1">
+              <a:t>      </a:t>
+            </a:r>
+            <a:r>
+              <a:rPr lang="zh-CN" altLang="en-US" sz="1600">
+                <a:solidFill>
+                  <a:schemeClr val="tx1"/>
+                </a:solidFill>
+                <a:latin typeface="宋体" panose="02010600030101010101" pitchFamily="2" charset="-122"/>
+                <a:ea typeface="宋体" panose="02010600030101010101" pitchFamily="2" charset="-122"/>
+              </a:rPr>
+              <a:t>时序时间标记</a:t>
+            </a:r>
+            <a:endParaRPr lang="zh-CN" altLang="en-US" sz="1600">
               <a:solidFill>
                 <a:schemeClr val="tx1"/>
               </a:solidFill>
@@ -3160,14 +3298,151 @@
       </p:sp>
       <p:sp>
         <p:nvSpPr>
-          <p:cNvPr id="61" name="矩形 60"/>
+          <p:cNvPr id="47" name="矩形 46"/>
           <p:cNvSpPr/>
           <p:nvPr/>
         </p:nvSpPr>
         <p:spPr>
           <a:xfrm>
-            <a:off x="420370" y="3260090"/>
-            <a:ext cx="1986280" cy="459740"/>
+            <a:off x="191770" y="2084705"/>
+            <a:ext cx="2023110" cy="710565"/>
+          </a:xfrm>
+          <a:prstGeom prst="rect">
+            <a:avLst/>
+          </a:prstGeom>
+          <a:solidFill>
+            <a:srgbClr val="FFFFFF"/>
+          </a:solidFill>
+          <a:ln>
+            <a:solidFill>
+              <a:srgbClr val="BDD6EC"/>
+            </a:solidFill>
+          </a:ln>
+        </p:spPr>
+        <p:style>
+          <a:lnRef idx="0">
+            <a:srgbClr val="FFFFFF"/>
+          </a:lnRef>
+          <a:fillRef idx="1">
+            <a:schemeClr val="accent1"/>
+          </a:fillRef>
+          <a:effectRef idx="0">
+            <a:srgbClr val="FFFFFF"/>
+          </a:effectRef>
+          <a:fontRef idx="minor">
+            <a:schemeClr val="lt1"/>
+          </a:fontRef>
+        </p:style>
+        <p:txBody>
+          <a:bodyPr rtlCol="0" anchor="ctr"/>
+          <a:p>
+            <a:pPr algn="l"/>
+            <a:r>
+              <a:rPr lang="en-US" altLang="zh-CN" sz="1500">
+                <a:solidFill>
+                  <a:schemeClr val="tx1"/>
+                </a:solidFill>
+                <a:latin typeface="宋体" panose="02010600030101010101" pitchFamily="2" charset="-122"/>
+                <a:ea typeface="宋体" panose="02010600030101010101" pitchFamily="2" charset="-122"/>
+              </a:rPr>
+              <a:t>·</a:t>
+            </a:r>
+            <a:r>
+              <a:rPr lang="zh-CN" altLang="en-US" sz="1500">
+                <a:solidFill>
+                  <a:schemeClr val="tx1"/>
+                </a:solidFill>
+                <a:latin typeface="宋体" panose="02010600030101010101" pitchFamily="2" charset="-122"/>
+                <a:ea typeface="宋体" panose="02010600030101010101" pitchFamily="2" charset="-122"/>
+              </a:rPr>
+              <a:t>扫视开始时间</a:t>
+            </a:r>
+            <a:endParaRPr lang="zh-CN" altLang="en-US" sz="1500">
+              <a:solidFill>
+                <a:schemeClr val="tx1"/>
+              </a:solidFill>
+              <a:latin typeface="宋体" panose="02010600030101010101" pitchFamily="2" charset="-122"/>
+              <a:ea typeface="宋体" panose="02010600030101010101" pitchFamily="2" charset="-122"/>
+            </a:endParaRPr>
+          </a:p>
+          <a:p>
+            <a:pPr algn="l"/>
+            <a:r>
+              <a:rPr lang="en-US" altLang="zh-CN" sz="1500">
+                <a:solidFill>
+                  <a:schemeClr val="tx1"/>
+                </a:solidFill>
+                <a:latin typeface="宋体" panose="02010600030101010101" pitchFamily="2" charset="-122"/>
+                <a:ea typeface="宋体" panose="02010600030101010101" pitchFamily="2" charset="-122"/>
+                <a:sym typeface="+mn-ea"/>
+              </a:rPr>
+              <a:t>·</a:t>
+            </a:r>
+            <a:r>
+              <a:rPr lang="zh-CN" altLang="en-US" sz="1500">
+                <a:solidFill>
+                  <a:schemeClr val="tx1"/>
+                </a:solidFill>
+                <a:latin typeface="宋体" panose="02010600030101010101" pitchFamily="2" charset="-122"/>
+                <a:ea typeface="宋体" panose="02010600030101010101" pitchFamily="2" charset="-122"/>
+                <a:sym typeface="+mn-ea"/>
+              </a:rPr>
+              <a:t>扫视结束时间</a:t>
+            </a:r>
+            <a:endParaRPr lang="zh-CN" altLang="en-US" sz="1500">
+              <a:solidFill>
+                <a:schemeClr val="tx1"/>
+              </a:solidFill>
+              <a:latin typeface="宋体" panose="02010600030101010101" pitchFamily="2" charset="-122"/>
+              <a:ea typeface="宋体" panose="02010600030101010101" pitchFamily="2" charset="-122"/>
+              <a:sym typeface="+mn-ea"/>
+            </a:endParaRPr>
+          </a:p>
+          <a:p>
+            <a:pPr algn="l"/>
+            <a:r>
+              <a:rPr lang="en-US" altLang="zh-CN" sz="1500">
+                <a:solidFill>
+                  <a:schemeClr val="tx1"/>
+                </a:solidFill>
+                <a:latin typeface="宋体" panose="02010600030101010101" pitchFamily="2" charset="-122"/>
+                <a:ea typeface="宋体" panose="02010600030101010101" pitchFamily="2" charset="-122"/>
+                <a:sym typeface="+mn-ea"/>
+              </a:rPr>
+              <a:t>·</a:t>
+            </a:r>
+            <a:r>
+              <a:rPr lang="zh-CN" altLang="en-US" sz="1500">
+                <a:solidFill>
+                  <a:schemeClr val="tx1"/>
+                </a:solidFill>
+                <a:latin typeface="宋体" panose="02010600030101010101" pitchFamily="2" charset="-122"/>
+                <a:ea typeface="宋体" panose="02010600030101010101" pitchFamily="2" charset="-122"/>
+                <a:sym typeface="+mn-ea"/>
+              </a:rPr>
+              <a:t>窗口状态</a:t>
+            </a:r>
+            <a:endParaRPr lang="zh-CN" altLang="en-US" sz="1500">
+              <a:solidFill>
+                <a:schemeClr val="tx1"/>
+              </a:solidFill>
+              <a:latin typeface="宋体" panose="02010600030101010101" pitchFamily="2" charset="-122"/>
+              <a:ea typeface="宋体" panose="02010600030101010101" pitchFamily="2" charset="-122"/>
+              <a:sym typeface="+mn-ea"/>
+            </a:endParaRPr>
+          </a:p>
+        </p:txBody>
+      </p:sp>
+      <p:sp>
+        <p:nvSpPr>
+          <p:cNvPr id="51" name="矩形 50"/>
+          <p:cNvSpPr/>
+          <p:nvPr/>
+        </p:nvSpPr>
+        <p:spPr>
+          <a:xfrm>
+            <a:off x="191770" y="2869565"/>
+            <a:ext cx="2023110" cy="459740"/>
           </a:xfrm>
           <a:prstGeom prst="rect">
             <a:avLst/>
@@ -3200,26 +3475,46 @@
           <a:p>
             <a:pPr algn="ctr"/>
             <a:r>
-              <a:rPr lang="en-US" sz="1400" b="1">
+              <a:rPr lang="en-US" altLang="zh-CN" sz="1600">
                 <a:solidFill>
                   <a:schemeClr val="tx1"/>
                 </a:solidFill>
                 <a:latin typeface="宋体" panose="02010600030101010101" pitchFamily="2" charset="-122"/>
                 <a:ea typeface="宋体" panose="02010600030101010101" pitchFamily="2" charset="-122"/>
               </a:rPr>
-              <a:t>castleCSF-TS</a:t>
-            </a:r>
-            <a:r>
-              <a:rPr lang="zh-CN" altLang="en-US" sz="1400" b="1">
+              <a:t>      </a:t>
+            </a:r>
+            <a:r>
+              <a:rPr lang="zh-CN" altLang="en-US" sz="1600">
                 <a:solidFill>
                   <a:schemeClr val="tx1"/>
                 </a:solidFill>
                 <a:latin typeface="宋体" panose="02010600030101010101" pitchFamily="2" charset="-122"/>
                 <a:ea typeface="宋体" panose="02010600030101010101" pitchFamily="2" charset="-122"/>
               </a:rPr>
-              <a:t>模型</a:t>
-            </a:r>
-            <a:endParaRPr lang="zh-CN" altLang="en-US" sz="1400" b="1">
+              <a:t>场景</a:t>
+            </a:r>
+            <a:r>
+              <a:rPr lang="en-US" altLang="zh-CN" sz="1600">
+                <a:solidFill>
+                  <a:schemeClr val="tx1"/>
+                </a:solidFill>
+                <a:latin typeface="宋体" panose="02010600030101010101" pitchFamily="2" charset="-122"/>
+                <a:ea typeface="宋体" panose="02010600030101010101" pitchFamily="2" charset="-122"/>
+              </a:rPr>
+              <a:t>内容</a:t>
+            </a:r>
+            <a:r>
+              <a:rPr lang="zh-CN" altLang="en-US" sz="1600">
+                <a:solidFill>
+                  <a:schemeClr val="tx1"/>
+                </a:solidFill>
+                <a:latin typeface="宋体" panose="02010600030101010101" pitchFamily="2" charset="-122"/>
+                <a:ea typeface="宋体" panose="02010600030101010101" pitchFamily="2" charset="-122"/>
+              </a:rPr>
+              <a:t>参数</a:t>
+            </a:r>
+            <a:endParaRPr lang="zh-CN" altLang="en-US" sz="1600">
               <a:solidFill>
                 <a:schemeClr val="tx1"/>
               </a:solidFill>
@@ -3231,14 +3526,250 @@
       </p:sp>
       <p:sp>
         <p:nvSpPr>
-          <p:cNvPr id="63" name="矩形 62"/>
+          <p:cNvPr id="54" name="矩形 53"/>
           <p:cNvSpPr/>
           <p:nvPr/>
         </p:nvSpPr>
         <p:spPr>
           <a:xfrm>
-            <a:off x="420370" y="4195445"/>
-            <a:ext cx="1986280" cy="459740"/>
+            <a:off x="191770" y="3329305"/>
+            <a:ext cx="2023110" cy="1475105"/>
+          </a:xfrm>
+          <a:prstGeom prst="rect">
+            <a:avLst/>
+          </a:prstGeom>
+          <a:solidFill>
+            <a:srgbClr val="FFFFFF"/>
+          </a:solidFill>
+          <a:ln>
+            <a:solidFill>
+              <a:srgbClr val="BDD6EC"/>
+            </a:solidFill>
+          </a:ln>
+        </p:spPr>
+        <p:style>
+          <a:lnRef idx="0">
+            <a:srgbClr val="FFFFFF"/>
+          </a:lnRef>
+          <a:fillRef idx="1">
+            <a:schemeClr val="accent1"/>
+          </a:fillRef>
+          <a:effectRef idx="0">
+            <a:srgbClr val="FFFFFF"/>
+          </a:effectRef>
+          <a:fontRef idx="minor">
+            <a:schemeClr val="lt1"/>
+          </a:fontRef>
+        </p:style>
+        <p:txBody>
+          <a:bodyPr rtlCol="0" anchor="ctr"/>
+          <a:p>
+            <a:pPr algn="l"/>
+            <a:r>
+              <a:rPr lang="en-US" altLang="zh-CN" sz="1500">
+                <a:solidFill>
+                  <a:schemeClr val="tx1"/>
+                </a:solidFill>
+                <a:latin typeface="宋体" panose="02010600030101010101" pitchFamily="2" charset="-122"/>
+                <a:ea typeface="宋体" panose="02010600030101010101" pitchFamily="2" charset="-122"/>
+              </a:rPr>
+              <a:t>·</a:t>
+            </a:r>
+            <a:r>
+              <a:rPr lang="zh-CN" altLang="en-US" sz="1500">
+                <a:solidFill>
+                  <a:schemeClr val="tx1"/>
+                </a:solidFill>
+                <a:latin typeface="宋体" panose="02010600030101010101" pitchFamily="2" charset="-122"/>
+                <a:ea typeface="宋体" panose="02010600030101010101" pitchFamily="2" charset="-122"/>
+              </a:rPr>
+              <a:t>平均亮度</a:t>
+            </a:r>
+            <a:endParaRPr lang="zh-CN" altLang="en-US" sz="1500">
+              <a:solidFill>
+                <a:schemeClr val="tx1"/>
+              </a:solidFill>
+              <a:latin typeface="宋体" panose="02010600030101010101" pitchFamily="2" charset="-122"/>
+              <a:ea typeface="宋体" panose="02010600030101010101" pitchFamily="2" charset="-122"/>
+            </a:endParaRPr>
+          </a:p>
+          <a:p>
+            <a:pPr algn="l"/>
+            <a:r>
+              <a:rPr lang="en-US" altLang="zh-CN" sz="1500">
+                <a:solidFill>
+                  <a:schemeClr val="tx1"/>
+                </a:solidFill>
+                <a:latin typeface="宋体" panose="02010600030101010101" pitchFamily="2" charset="-122"/>
+                <a:ea typeface="宋体" panose="02010600030101010101" pitchFamily="2" charset="-122"/>
+                <a:sym typeface="+mn-ea"/>
+              </a:rPr>
+              <a:t>·</a:t>
+            </a:r>
+            <a:r>
+              <a:rPr lang="zh-CN" altLang="en-US" sz="1500">
+                <a:solidFill>
+                  <a:schemeClr val="tx1"/>
+                </a:solidFill>
+                <a:latin typeface="宋体" panose="02010600030101010101" pitchFamily="2" charset="-122"/>
+                <a:ea typeface="宋体" panose="02010600030101010101" pitchFamily="2" charset="-122"/>
+                <a:sym typeface="+mn-ea"/>
+              </a:rPr>
+              <a:t>空间频率</a:t>
+            </a:r>
+            <a:endParaRPr lang="zh-CN" altLang="en-US" sz="1500">
+              <a:solidFill>
+                <a:schemeClr val="tx1"/>
+              </a:solidFill>
+              <a:latin typeface="宋体" panose="02010600030101010101" pitchFamily="2" charset="-122"/>
+              <a:ea typeface="宋体" panose="02010600030101010101" pitchFamily="2" charset="-122"/>
+              <a:sym typeface="+mn-ea"/>
+            </a:endParaRPr>
+          </a:p>
+          <a:p>
+            <a:pPr algn="l"/>
+            <a:r>
+              <a:rPr lang="en-US" altLang="zh-CN" sz="1500">
+                <a:solidFill>
+                  <a:schemeClr val="tx1"/>
+                </a:solidFill>
+                <a:latin typeface="宋体" panose="02010600030101010101" pitchFamily="2" charset="-122"/>
+                <a:ea typeface="宋体" panose="02010600030101010101" pitchFamily="2" charset="-122"/>
+                <a:sym typeface="+mn-ea"/>
+              </a:rPr>
+              <a:t>·</a:t>
+            </a:r>
+            <a:r>
+              <a:rPr lang="zh-CN" altLang="en-US" sz="1500">
+                <a:solidFill>
+                  <a:schemeClr val="tx1"/>
+                </a:solidFill>
+                <a:latin typeface="宋体" panose="02010600030101010101" pitchFamily="2" charset="-122"/>
+                <a:ea typeface="宋体" panose="02010600030101010101" pitchFamily="2" charset="-122"/>
+                <a:sym typeface="+mn-ea"/>
+              </a:rPr>
+              <a:t>时间频率</a:t>
+            </a:r>
+            <a:endParaRPr lang="zh-CN" altLang="en-US" sz="1500">
+              <a:solidFill>
+                <a:schemeClr val="tx1"/>
+              </a:solidFill>
+              <a:latin typeface="宋体" panose="02010600030101010101" pitchFamily="2" charset="-122"/>
+              <a:ea typeface="宋体" panose="02010600030101010101" pitchFamily="2" charset="-122"/>
+              <a:sym typeface="+mn-ea"/>
+            </a:endParaRPr>
+          </a:p>
+          <a:p>
+            <a:pPr algn="l"/>
+            <a:r>
+              <a:rPr lang="en-US" altLang="zh-CN" sz="1500">
+                <a:solidFill>
+                  <a:schemeClr val="tx1"/>
+                </a:solidFill>
+                <a:latin typeface="宋体" panose="02010600030101010101" pitchFamily="2" charset="-122"/>
+                <a:ea typeface="宋体" panose="02010600030101010101" pitchFamily="2" charset="-122"/>
+                <a:sym typeface="+mn-ea"/>
+              </a:rPr>
+              <a:t>·</a:t>
+            </a:r>
+            <a:r>
+              <a:rPr lang="zh-CN" altLang="en-US" sz="1500">
+                <a:solidFill>
+                  <a:schemeClr val="tx1"/>
+                </a:solidFill>
+                <a:latin typeface="宋体" panose="02010600030101010101" pitchFamily="2" charset="-122"/>
+                <a:ea typeface="宋体" panose="02010600030101010101" pitchFamily="2" charset="-122"/>
+                <a:sym typeface="+mn-ea"/>
+              </a:rPr>
+              <a:t>色彩</a:t>
+            </a:r>
+            <a:endParaRPr lang="zh-CN" altLang="en-US" sz="1500">
+              <a:solidFill>
+                <a:schemeClr val="tx1"/>
+              </a:solidFill>
+              <a:latin typeface="宋体" panose="02010600030101010101" pitchFamily="2" charset="-122"/>
+              <a:ea typeface="宋体" panose="02010600030101010101" pitchFamily="2" charset="-122"/>
+              <a:sym typeface="+mn-ea"/>
+            </a:endParaRPr>
+          </a:p>
+          <a:p>
+            <a:pPr algn="l"/>
+            <a:r>
+              <a:rPr lang="en-US" altLang="zh-CN" sz="1500">
+                <a:solidFill>
+                  <a:schemeClr val="tx1"/>
+                </a:solidFill>
+                <a:latin typeface="宋体" panose="02010600030101010101" pitchFamily="2" charset="-122"/>
+                <a:ea typeface="宋体" panose="02010600030101010101" pitchFamily="2" charset="-122"/>
+                <a:sym typeface="+mn-ea"/>
+              </a:rPr>
+              <a:t>·</a:t>
+            </a:r>
+            <a:r>
+              <a:rPr lang="zh-CN" altLang="en-US" sz="1500">
+                <a:solidFill>
+                  <a:schemeClr val="tx1"/>
+                </a:solidFill>
+                <a:latin typeface="宋体" panose="02010600030101010101" pitchFamily="2" charset="-122"/>
+                <a:ea typeface="宋体" panose="02010600030101010101" pitchFamily="2" charset="-122"/>
+                <a:sym typeface="+mn-ea"/>
+              </a:rPr>
+              <a:t>偏心度</a:t>
+            </a:r>
+            <a:endParaRPr lang="zh-CN" altLang="en-US" sz="1500">
+              <a:solidFill>
+                <a:schemeClr val="tx1"/>
+              </a:solidFill>
+              <a:latin typeface="宋体" panose="02010600030101010101" pitchFamily="2" charset="-122"/>
+              <a:ea typeface="宋体" panose="02010600030101010101" pitchFamily="2" charset="-122"/>
+              <a:sym typeface="+mn-ea"/>
+            </a:endParaRPr>
+          </a:p>
+          <a:p>
+            <a:pPr algn="l"/>
+            <a:r>
+              <a:rPr lang="en-US" altLang="zh-CN" sz="1500">
+                <a:solidFill>
+                  <a:schemeClr val="tx1"/>
+                </a:solidFill>
+                <a:latin typeface="宋体" panose="02010600030101010101" pitchFamily="2" charset="-122"/>
+                <a:ea typeface="宋体" panose="02010600030101010101" pitchFamily="2" charset="-122"/>
+                <a:sym typeface="+mn-ea"/>
+              </a:rPr>
+              <a:t>·</a:t>
+            </a:r>
+            <a:r>
+              <a:rPr lang="zh-CN" altLang="en-US" sz="1500">
+                <a:solidFill>
+                  <a:schemeClr val="tx1"/>
+                </a:solidFill>
+                <a:latin typeface="宋体" panose="02010600030101010101" pitchFamily="2" charset="-122"/>
+                <a:ea typeface="宋体" panose="02010600030101010101" pitchFamily="2" charset="-122"/>
+                <a:sym typeface="+mn-ea"/>
+              </a:rPr>
+              <a:t>刺激面积</a:t>
+            </a:r>
+            <a:endParaRPr lang="zh-CN" altLang="en-US" sz="1500">
+              <a:solidFill>
+                <a:schemeClr val="tx1"/>
+              </a:solidFill>
+              <a:latin typeface="宋体" panose="02010600030101010101" pitchFamily="2" charset="-122"/>
+              <a:ea typeface="宋体" panose="02010600030101010101" pitchFamily="2" charset="-122"/>
+              <a:sym typeface="+mn-ea"/>
+            </a:endParaRPr>
+          </a:p>
+        </p:txBody>
+      </p:sp>
+      <p:sp>
+        <p:nvSpPr>
+          <p:cNvPr id="55" name="矩形 54"/>
+          <p:cNvSpPr/>
+          <p:nvPr/>
+        </p:nvSpPr>
+        <p:spPr>
+          <a:xfrm>
+            <a:off x="191135" y="4893945"/>
+            <a:ext cx="2032635" cy="459740"/>
           </a:xfrm>
           <a:prstGeom prst="rect">
             <a:avLst/>
@@ -3271,26 +3802,26 @@
           <a:p>
             <a:pPr algn="ctr"/>
             <a:r>
-              <a:rPr lang="en-US" altLang="zh-CN" sz="1400" b="1">
+              <a:rPr lang="en-US" altLang="zh-CN" sz="1600">
                 <a:solidFill>
                   <a:schemeClr val="tx1"/>
                 </a:solidFill>
                 <a:latin typeface="宋体" panose="02010600030101010101" pitchFamily="2" charset="-122"/>
                 <a:ea typeface="宋体" panose="02010600030101010101" pitchFamily="2" charset="-122"/>
               </a:rPr>
-              <a:t>LOD</a:t>
-            </a:r>
-            <a:r>
-              <a:rPr lang="zh-CN" altLang="en-US" sz="1400" b="1">
+              <a:t>      </a:t>
+            </a:r>
+            <a:r>
+              <a:rPr lang="zh-CN" altLang="en-US" sz="1600">
                 <a:solidFill>
                   <a:schemeClr val="tx1"/>
                 </a:solidFill>
                 <a:latin typeface="宋体" panose="02010600030101010101" pitchFamily="2" charset="-122"/>
                 <a:ea typeface="宋体" panose="02010600030101010101" pitchFamily="2" charset="-122"/>
               </a:rPr>
-              <a:t>层级</a:t>
-            </a:r>
-            <a:endParaRPr lang="zh-CN" altLang="en-US" sz="1400" b="1">
+              <a:t>设备物理参数</a:t>
+            </a:r>
+            <a:endParaRPr lang="zh-CN" altLang="en-US" sz="1600">
               <a:solidFill>
                 <a:schemeClr val="tx1"/>
               </a:solidFill>
@@ -3302,36 +3833,66 @@
       </p:sp>
       <p:sp>
         <p:nvSpPr>
-          <p:cNvPr id="69" name="文本框 68"/>
-          <p:cNvSpPr txBox="1"/>
+          <p:cNvPr id="56" name="矩形 55"/>
+          <p:cNvSpPr/>
           <p:nvPr/>
         </p:nvSpPr>
         <p:spPr>
           <a:xfrm>
-            <a:off x="943610" y="845185"/>
-            <a:ext cx="1104900" cy="337185"/>
+            <a:off x="191135" y="5353685"/>
+            <a:ext cx="2032635" cy="619125"/>
           </a:xfrm>
           <a:prstGeom prst="rect">
             <a:avLst/>
           </a:prstGeom>
-          <a:noFill/>
-        </p:spPr>
-        <p:txBody>
-          <a:bodyPr wrap="square" rtlCol="0">
-            <a:spAutoFit/>
-          </a:bodyPr>
-          <a:p>
-            <a:r>
-              <a:rPr lang="zh-CN" altLang="en-US" sz="1600" b="1">
+          <a:solidFill>
+            <a:srgbClr val="FFFFFF"/>
+          </a:solidFill>
+          <a:ln>
+            <a:solidFill>
+              <a:srgbClr val="BDD6EC"/>
+            </a:solidFill>
+          </a:ln>
+        </p:spPr>
+        <p:style>
+          <a:lnRef idx="0">
+            <a:srgbClr val="FFFFFF"/>
+          </a:lnRef>
+          <a:fillRef idx="1">
+            <a:schemeClr val="accent1"/>
+          </a:fillRef>
+          <a:effectRef idx="0">
+            <a:srgbClr val="FFFFFF"/>
+          </a:effectRef>
+          <a:fontRef idx="minor">
+            <a:schemeClr val="lt1"/>
+          </a:fontRef>
+        </p:style>
+        <p:txBody>
+          <a:bodyPr rtlCol="0" anchor="ctr"/>
+          <a:p>
+            <a:pPr algn="l"/>
+            <a:r>
+              <a:rPr lang="en-US" altLang="zh-CN" sz="1500">
                 <a:solidFill>
                   <a:schemeClr val="tx1"/>
                 </a:solidFill>
                 <a:latin typeface="宋体" panose="02010600030101010101" pitchFamily="2" charset="-122"/>
                 <a:ea typeface="宋体" panose="02010600030101010101" pitchFamily="2" charset="-122"/>
               </a:rPr>
-              <a:t>输入模块</a:t>
-            </a:r>
-            <a:endParaRPr lang="zh-CN" altLang="en-US" sz="1600" b="1">
+              <a:t>·</a:t>
+            </a:r>
+            <a:r>
+              <a:rPr lang="zh-CN" altLang="en-US" sz="1500">
+                <a:solidFill>
+                  <a:schemeClr val="tx1"/>
+                </a:solidFill>
+                <a:latin typeface="宋体" panose="02010600030101010101" pitchFamily="2" charset="-122"/>
+                <a:ea typeface="宋体" panose="02010600030101010101" pitchFamily="2" charset="-122"/>
+              </a:rPr>
+              <a:t>像素密度</a:t>
+            </a:r>
+            <a:endParaRPr lang="zh-CN" altLang="en-US" sz="1500">
               <a:solidFill>
                 <a:schemeClr val="tx1"/>
               </a:solidFill>
@@ -3339,31 +3900,112 @@
               <a:ea typeface="宋体" panose="02010600030101010101" pitchFamily="2" charset="-122"/>
             </a:endParaRPr>
           </a:p>
-        </p:txBody>
-      </p:sp>
-      <p:sp>
-        <p:nvSpPr>
-          <p:cNvPr id="81" name="矩形 80"/>
-          <p:cNvSpPr/>
+          <a:p>
+            <a:pPr algn="l"/>
+            <a:r>
+              <a:rPr lang="en-US" altLang="zh-CN" sz="1500">
+                <a:solidFill>
+                  <a:schemeClr val="tx1"/>
+                </a:solidFill>
+                <a:latin typeface="宋体" panose="02010600030101010101" pitchFamily="2" charset="-122"/>
+                <a:ea typeface="宋体" panose="02010600030101010101" pitchFamily="2" charset="-122"/>
+                <a:sym typeface="+mn-ea"/>
+              </a:rPr>
+              <a:t>·</a:t>
+            </a:r>
+            <a:r>
+              <a:rPr lang="zh-CN" altLang="en-US" sz="1500">
+                <a:solidFill>
+                  <a:schemeClr val="tx1"/>
+                </a:solidFill>
+                <a:latin typeface="宋体" panose="02010600030101010101" pitchFamily="2" charset="-122"/>
+                <a:ea typeface="宋体" panose="02010600030101010101" pitchFamily="2" charset="-122"/>
+                <a:sym typeface="+mn-ea"/>
+              </a:rPr>
+              <a:t>奈奎斯特频率</a:t>
+            </a:r>
+            <a:endParaRPr lang="zh-CN" altLang="en-US" sz="1500">
+              <a:solidFill>
+                <a:schemeClr val="tx1"/>
+              </a:solidFill>
+              <a:latin typeface="宋体" panose="02010600030101010101" pitchFamily="2" charset="-122"/>
+              <a:ea typeface="宋体" panose="02010600030101010101" pitchFamily="2" charset="-122"/>
+              <a:sym typeface="+mn-ea"/>
+            </a:endParaRPr>
+          </a:p>
+        </p:txBody>
+      </p:sp>
+      <p:sp>
+        <p:nvSpPr>
+          <p:cNvPr id="57" name="文本框 56"/>
+          <p:cNvSpPr txBox="1"/>
           <p:nvPr/>
         </p:nvSpPr>
         <p:spPr>
           <a:xfrm>
-            <a:off x="2991485" y="688975"/>
-            <a:ext cx="5680075" cy="5957570"/>
+            <a:off x="643255" y="133985"/>
+            <a:ext cx="1104900" cy="352425"/>
           </a:xfrm>
           <a:prstGeom prst="rect">
             <a:avLst/>
           </a:prstGeom>
-          <a:solidFill>
-            <a:srgbClr val="EFEFEF"/>
-          </a:solidFill>
+          <a:noFill/>
+        </p:spPr>
+        <p:txBody>
+          <a:bodyPr wrap="square" rtlCol="0">
+            <a:spAutoFit/>
+          </a:bodyPr>
+          <a:p>
+            <a:r>
+              <a:rPr lang="zh-CN" altLang="en-US" sz="1700" b="1">
+                <a:solidFill>
+                  <a:schemeClr val="tx1"/>
+                </a:solidFill>
+                <a:latin typeface="宋体" panose="02010600030101010101" pitchFamily="2" charset="-122"/>
+                <a:ea typeface="宋体" panose="02010600030101010101" pitchFamily="2" charset="-122"/>
+              </a:rPr>
+              <a:t>输入模块</a:t>
+            </a:r>
+            <a:endParaRPr lang="zh-CN" altLang="en-US" sz="1700" b="1">
+              <a:solidFill>
+                <a:schemeClr val="tx1"/>
+              </a:solidFill>
+              <a:latin typeface="宋体" panose="02010600030101010101" pitchFamily="2" charset="-122"/>
+              <a:ea typeface="宋体" panose="02010600030101010101" pitchFamily="2" charset="-122"/>
+            </a:endParaRPr>
+          </a:p>
+        </p:txBody>
+      </p:sp>
+      <p:sp>
+        <p:nvSpPr>
+          <p:cNvPr id="58" name="矩形 57"/>
+          <p:cNvSpPr/>
+          <p:nvPr/>
+        </p:nvSpPr>
+        <p:spPr>
+          <a:xfrm>
+            <a:off x="2815590" y="88900"/>
+            <a:ext cx="5680075" cy="5957570"/>
+          </a:xfrm>
+          <a:prstGeom prst="rect">
+            <a:avLst/>
+          </a:prstGeom>
+          <a:noFill/>
           <a:ln>
             <a:solidFill>
               <a:schemeClr val="tx1"/>
             </a:solidFill>
-            <a:prstDash val="sysDash"/>
+            <a:prstDash val="solid"/>
           </a:ln>
+          <a:extLst>
+            <a:ext uri="{909E8E84-426E-40DD-AFC4-6F175D3DCCD1}">
+              <a14:hiddenFill xmlns:a14="http://schemas.microsoft.com/office/drawing/2010/main">
+                <a:solidFill>
+                  <a:srgbClr val="EFEFEF"/>
+                </a:solidFill>
+              </a14:hiddenFill>
+            </a:ext>
+          </a:extLst>
         </p:spPr>
         <p:style>
           <a:lnRef idx="2">
@@ -3385,26 +4027,26 @@
           <a:bodyPr rtlCol="0" anchor="ctr"/>
           <a:p>
             <a:pPr algn="ctr"/>
-            <a:endParaRPr lang="zh-CN" altLang="en-US" b="1"/>
-          </a:p>
-        </p:txBody>
-      </p:sp>
-      <p:sp>
-        <p:nvSpPr>
-          <p:cNvPr id="83" name="矩形 82"/>
+            <a:endParaRPr lang="zh-CN" altLang="en-US"/>
+          </a:p>
+        </p:txBody>
+      </p:sp>
+      <p:sp>
+        <p:nvSpPr>
+          <p:cNvPr id="59" name="矩形 58"/>
           <p:cNvSpPr/>
           <p:nvPr/>
         </p:nvSpPr>
         <p:spPr>
           <a:xfrm>
-            <a:off x="3134995" y="1105535"/>
+            <a:off x="2959100" y="505460"/>
             <a:ext cx="5410835" cy="459740"/>
           </a:xfrm>
           <a:prstGeom prst="rect">
             <a:avLst/>
           </a:prstGeom>
           <a:solidFill>
-            <a:srgbClr val="D9E7F1"/>
+            <a:srgbClr val="D8E3F1"/>
           </a:solidFill>
           <a:ln>
             <a:solidFill>
@@ -3427,35 +4069,42 @@
           </a:fontRef>
         </p:style>
         <p:txBody>
-          <a:bodyPr rtlCol="0" anchor="ctr"/>
-          <a:p>
-            <a:pPr algn="ctr"/>
-            <a:endParaRPr lang="zh-CN" altLang="en-US" sz="1400" b="1">
+          <a:bodyPr vertOverflow="overflow" horzOverflow="overflow" vert="horz" wrap="square" numCol="1" spcCol="0" rtlCol="0" fromWordArt="0" anchor="ctr" anchorCtr="0" forceAA="0" compatLnSpc="1">
+            <a:noAutofit/>
+          </a:bodyPr>
+          <a:p>
+            <a:pPr lvl="0" algn="ctr">
+              <a:buClrTx/>
+              <a:buSzTx/>
+              <a:buFontTx/>
+            </a:pPr>
+            <a:endParaRPr lang="en-US" altLang="zh-CN" sz="1400">
               <a:solidFill>
                 <a:schemeClr val="tx1"/>
               </a:solidFill>
               <a:latin typeface="宋体" panose="02010600030101010101" pitchFamily="2" charset="-122"/>
               <a:ea typeface="宋体" panose="02010600030101010101" pitchFamily="2" charset="-122"/>
+              <a:sym typeface="+mn-ea"/>
             </a:endParaRPr>
           </a:p>
         </p:txBody>
       </p:sp>
       <p:sp>
         <p:nvSpPr>
-          <p:cNvPr id="85" name="矩形 84"/>
+          <p:cNvPr id="60" name="矩形 59"/>
           <p:cNvSpPr/>
           <p:nvPr/>
         </p:nvSpPr>
         <p:spPr>
           <a:xfrm>
-            <a:off x="3134995" y="1946275"/>
+            <a:off x="2959100" y="1346200"/>
             <a:ext cx="5412105" cy="459740"/>
           </a:xfrm>
           <a:prstGeom prst="rect">
             <a:avLst/>
           </a:prstGeom>
           <a:solidFill>
-            <a:srgbClr val="D9E7F1"/>
+            <a:srgbClr val="D8E3F1"/>
           </a:solidFill>
           <a:ln>
             <a:solidFill>
@@ -3478,35 +4127,42 @@
           </a:fontRef>
         </p:style>
         <p:txBody>
-          <a:bodyPr rtlCol="0" anchor="ctr"/>
-          <a:p>
-            <a:pPr algn="ctr"/>
-            <a:endParaRPr lang="zh-CN" altLang="en-US" sz="1400" b="1">
+          <a:bodyPr vertOverflow="overflow" horzOverflow="overflow" vert="horz" wrap="square" numCol="1" spcCol="0" rtlCol="0" fromWordArt="0" anchor="ctr" anchorCtr="0" forceAA="0" compatLnSpc="1">
+            <a:noAutofit/>
+          </a:bodyPr>
+          <a:p>
+            <a:pPr lvl="0" algn="ctr">
+              <a:buClrTx/>
+              <a:buSzTx/>
+              <a:buFontTx/>
+            </a:pPr>
+            <a:endParaRPr lang="en-US" altLang="zh-CN" sz="1400">
               <a:solidFill>
                 <a:schemeClr val="tx1"/>
               </a:solidFill>
               <a:latin typeface="宋体" panose="02010600030101010101" pitchFamily="2" charset="-122"/>
               <a:ea typeface="宋体" panose="02010600030101010101" pitchFamily="2" charset="-122"/>
+              <a:sym typeface="+mn-ea"/>
             </a:endParaRPr>
           </a:p>
         </p:txBody>
       </p:sp>
       <p:sp>
         <p:nvSpPr>
-          <p:cNvPr id="86" name="矩形 85"/>
+          <p:cNvPr id="64" name="矩形 63"/>
           <p:cNvSpPr/>
           <p:nvPr/>
         </p:nvSpPr>
         <p:spPr>
           <a:xfrm>
-            <a:off x="3134995" y="2693035"/>
+            <a:off x="2959100" y="2092960"/>
             <a:ext cx="5412105" cy="459740"/>
           </a:xfrm>
           <a:prstGeom prst="rect">
             <a:avLst/>
           </a:prstGeom>
           <a:solidFill>
-            <a:srgbClr val="D9E7F1"/>
+            <a:srgbClr val="D8E3F1"/>
           </a:solidFill>
           <a:ln>
             <a:solidFill>
@@ -3529,28 +4185,35 @@
           </a:fontRef>
         </p:style>
         <p:txBody>
-          <a:bodyPr rtlCol="0" anchor="ctr"/>
-          <a:p>
-            <a:pPr algn="ctr"/>
-            <a:endParaRPr lang="zh-CN" altLang="en-US" sz="1400" b="1">
+          <a:bodyPr vertOverflow="overflow" horzOverflow="overflow" vert="horz" wrap="square" numCol="1" spcCol="0" rtlCol="0" fromWordArt="0" anchor="ctr" anchorCtr="0" forceAA="0" compatLnSpc="1">
+            <a:noAutofit/>
+          </a:bodyPr>
+          <a:p>
+            <a:pPr lvl="0" algn="ctr">
+              <a:buClrTx/>
+              <a:buSzTx/>
+              <a:buFontTx/>
+            </a:pPr>
+            <a:endParaRPr lang="en-US" altLang="zh-CN" sz="1400">
               <a:solidFill>
                 <a:schemeClr val="tx1"/>
               </a:solidFill>
               <a:latin typeface="宋体" panose="02010600030101010101" pitchFamily="2" charset="-122"/>
               <a:ea typeface="宋体" panose="02010600030101010101" pitchFamily="2" charset="-122"/>
+              <a:sym typeface="+mn-ea"/>
             </a:endParaRPr>
           </a:p>
         </p:txBody>
       </p:sp>
       <p:sp>
         <p:nvSpPr>
-          <p:cNvPr id="89" name="矩形 88"/>
+          <p:cNvPr id="65" name="矩形 64"/>
           <p:cNvSpPr/>
           <p:nvPr/>
         </p:nvSpPr>
         <p:spPr>
           <a:xfrm>
-            <a:off x="3134995" y="3366770"/>
+            <a:off x="2959100" y="2766695"/>
             <a:ext cx="5411470" cy="1288415"/>
           </a:xfrm>
           <a:prstGeom prst="rect">
@@ -3583,7 +4246,7 @@
           <a:bodyPr rtlCol="0" anchor="ctr"/>
           <a:p>
             <a:pPr algn="ctr"/>
-            <a:endParaRPr lang="zh-CN" altLang="en-US" sz="1400" b="1">
+            <a:endParaRPr lang="zh-CN" altLang="en-US" sz="1400">
               <a:solidFill>
                 <a:srgbClr val="FEF1C6"/>
               </a:solidFill>
@@ -3595,13 +4258,13 @@
       </p:sp>
       <p:sp>
         <p:nvSpPr>
-          <p:cNvPr id="91" name="矩形 90"/>
+          <p:cNvPr id="68" name="矩形 67"/>
           <p:cNvSpPr/>
           <p:nvPr/>
         </p:nvSpPr>
         <p:spPr>
           <a:xfrm>
-            <a:off x="3215005" y="3785235"/>
+            <a:off x="3039110" y="3185160"/>
             <a:ext cx="1638935" cy="683260"/>
           </a:xfrm>
           <a:prstGeom prst="rect">
@@ -3635,7 +4298,7 @@
           <a:p>
             <a:pPr algn="ctr"/>
             <a:r>
-              <a:rPr lang="zh-CN" sz="1300" b="1">
+              <a:rPr lang="zh-CN" sz="1400">
                 <a:solidFill>
                   <a:schemeClr val="tx1"/>
                 </a:solidFill>
@@ -3644,7 +4307,7 @@
               </a:rPr>
               <a:t>扫视窗口策略</a:t>
             </a:r>
-            <a:endParaRPr lang="zh-CN" sz="1300" b="1">
+            <a:endParaRPr lang="zh-CN" sz="1400">
               <a:solidFill>
                 <a:schemeClr val="tx1"/>
               </a:solidFill>
@@ -3655,7 +4318,7 @@
           <a:p>
             <a:pPr algn="ctr"/>
             <a:r>
-              <a:rPr lang="zh-CN" sz="1300" b="1">
+              <a:rPr lang="zh-CN" sz="1400">
                 <a:solidFill>
                   <a:schemeClr val="tx1"/>
                 </a:solidFill>
@@ -3665,7 +4328,7 @@
               </a:rPr>
               <a:t>前瞻性激进降采样</a:t>
             </a:r>
-            <a:endParaRPr lang="zh-CN" sz="1300" b="1">
+            <a:endParaRPr lang="zh-CN" sz="1400">
               <a:solidFill>
                 <a:schemeClr val="tx1"/>
               </a:solidFill>
@@ -3678,13 +4341,13 @@
       </p:sp>
       <p:sp>
         <p:nvSpPr>
-          <p:cNvPr id="92" name="矩形 91"/>
+          <p:cNvPr id="70" name="矩形 69"/>
           <p:cNvSpPr/>
           <p:nvPr/>
         </p:nvSpPr>
         <p:spPr>
           <a:xfrm>
-            <a:off x="4980940" y="3785235"/>
+            <a:off x="4805045" y="3185160"/>
             <a:ext cx="1638935" cy="683260"/>
           </a:xfrm>
           <a:prstGeom prst="rect">
@@ -3718,7 +4381,7 @@
           <a:p>
             <a:pPr algn="ctr"/>
             <a:r>
-              <a:rPr lang="zh-CN" sz="1300" b="1">
+              <a:rPr lang="zh-CN" sz="1400">
                 <a:solidFill>
                   <a:schemeClr val="tx1"/>
                 </a:solidFill>
@@ -3727,7 +4390,7 @@
               </a:rPr>
               <a:t>恢复窗口策略</a:t>
             </a:r>
-            <a:endParaRPr lang="zh-CN" sz="1300" b="1">
+            <a:endParaRPr lang="zh-CN" sz="1400">
               <a:solidFill>
                 <a:schemeClr val="tx1"/>
               </a:solidFill>
@@ -3738,7 +4401,7 @@
           <a:p>
             <a:pPr algn="ctr"/>
             <a:r>
-              <a:rPr lang="zh-CN" sz="1300" b="1">
+              <a:rPr lang="zh-CN" sz="1400">
                 <a:solidFill>
                   <a:schemeClr val="tx1"/>
                 </a:solidFill>
@@ -3748,7 +4411,7 @@
               </a:rPr>
               <a:t>动态平滑恢复</a:t>
             </a:r>
-            <a:endParaRPr lang="zh-CN" sz="1300" b="1">
+            <a:endParaRPr lang="zh-CN" sz="1400">
               <a:solidFill>
                 <a:schemeClr val="tx1"/>
               </a:solidFill>
@@ -3761,13 +4424,13 @@
       </p:sp>
       <p:sp>
         <p:nvSpPr>
-          <p:cNvPr id="93" name="矩形 92"/>
+          <p:cNvPr id="71" name="矩形 70"/>
           <p:cNvSpPr/>
           <p:nvPr/>
         </p:nvSpPr>
         <p:spPr>
           <a:xfrm>
-            <a:off x="6779260" y="3785235"/>
+            <a:off x="6603365" y="3185160"/>
             <a:ext cx="1638935" cy="683260"/>
           </a:xfrm>
           <a:prstGeom prst="rect">
@@ -3801,7 +4464,7 @@
           <a:p>
             <a:pPr algn="ctr"/>
             <a:r>
-              <a:rPr lang="zh-CN" sz="1300" b="1">
+              <a:rPr lang="zh-CN" sz="1400">
                 <a:solidFill>
                   <a:schemeClr val="tx1"/>
                 </a:solidFill>
@@ -3810,7 +4473,7 @@
               </a:rPr>
               <a:t>稳定注视期策略</a:t>
             </a:r>
-            <a:endParaRPr lang="zh-CN" sz="1300" b="1">
+            <a:endParaRPr lang="zh-CN" sz="1400">
               <a:solidFill>
                 <a:schemeClr val="tx1"/>
               </a:solidFill>
@@ -3821,7 +4484,7 @@
           <a:p>
             <a:pPr algn="ctr"/>
             <a:r>
-              <a:rPr lang="zh-CN" sz="1300" b="1">
+              <a:rPr lang="zh-CN" sz="1400">
                 <a:solidFill>
                   <a:schemeClr val="tx1"/>
                 </a:solidFill>
@@ -3831,7 +4494,7 @@
               </a:rPr>
               <a:t>全分辨率渲染</a:t>
             </a:r>
-            <a:endParaRPr lang="zh-CN" sz="1300" b="1">
+            <a:endParaRPr lang="zh-CN" sz="1400">
               <a:solidFill>
                 <a:schemeClr val="tx1"/>
               </a:solidFill>
@@ -3844,20 +4507,20 @@
       </p:sp>
       <p:sp>
         <p:nvSpPr>
-          <p:cNvPr id="96" name="矩形 95"/>
+          <p:cNvPr id="72" name="矩形 71"/>
           <p:cNvSpPr/>
           <p:nvPr/>
         </p:nvSpPr>
         <p:spPr>
           <a:xfrm>
-            <a:off x="3134995" y="4869180"/>
+            <a:off x="2959100" y="4269105"/>
             <a:ext cx="5412105" cy="998855"/>
           </a:xfrm>
           <a:prstGeom prst="rect">
             <a:avLst/>
           </a:prstGeom>
           <a:solidFill>
-            <a:srgbClr val="D9E7F1"/>
+            <a:srgbClr val="D8E3F1"/>
           </a:solidFill>
           <a:ln>
             <a:solidFill>
@@ -3880,66 +4543,16 @@
           </a:fontRef>
         </p:style>
         <p:txBody>
-          <a:bodyPr rtlCol="0" anchor="ctr"/>
-          <a:p>
-            <a:pPr algn="ctr"/>
-            <a:endParaRPr lang="zh-CN" altLang="en-US" sz="1400" b="1">
-              <a:solidFill>
-                <a:schemeClr val="tx1"/>
-              </a:solidFill>
-              <a:latin typeface="宋体" panose="02010600030101010101" pitchFamily="2" charset="-122"/>
-              <a:ea typeface="宋体" panose="02010600030101010101" pitchFamily="2" charset="-122"/>
-            </a:endParaRPr>
-          </a:p>
-        </p:txBody>
-      </p:sp>
-      <p:sp>
-        <p:nvSpPr>
-          <p:cNvPr id="97" name="文本框 96"/>
-          <p:cNvSpPr txBox="1"/>
-          <p:nvPr/>
-        </p:nvSpPr>
-        <p:spPr>
-          <a:xfrm>
-            <a:off x="3127375" y="1182370"/>
-            <a:ext cx="5419725" cy="306705"/>
-          </a:xfrm>
-          <a:prstGeom prst="rect">
-            <a:avLst/>
-          </a:prstGeom>
-          <a:noFill/>
-        </p:spPr>
-        <p:txBody>
-          <a:bodyPr wrap="square" rtlCol="0">
-            <a:spAutoFit/>
+          <a:bodyPr vertOverflow="overflow" horzOverflow="overflow" vert="horz" wrap="square" numCol="1" spcCol="0" rtlCol="0" fromWordArt="0" anchor="ctr" anchorCtr="0" forceAA="0" compatLnSpc="1">
+            <a:noAutofit/>
           </a:bodyPr>
           <a:p>
-            <a:pPr algn="ctr"/>
-            <a:r>
-              <a:rPr lang="zh-CN" sz="1400" b="1">
-                <a:latin typeface="宋体" panose="02010600030101010101" pitchFamily="2" charset="-122"/>
-                <a:ea typeface="宋体" panose="02010600030101010101" pitchFamily="2" charset="-122"/>
-                <a:sym typeface="+mn-ea"/>
-              </a:rPr>
-              <a:t>基础</a:t>
-            </a:r>
-            <a:r>
-              <a:rPr lang="en-US" altLang="zh-CN" sz="1400" b="1">
-                <a:latin typeface="宋体" panose="02010600030101010101" pitchFamily="2" charset="-122"/>
-                <a:ea typeface="宋体" panose="02010600030101010101" pitchFamily="2" charset="-122"/>
-                <a:sym typeface="+mn-ea"/>
-              </a:rPr>
-              <a:t>LOD</a:t>
-            </a:r>
-            <a:r>
-              <a:rPr lang="zh-CN" altLang="en-US" sz="1400" b="1">
-                <a:latin typeface="宋体" panose="02010600030101010101" pitchFamily="2" charset="-122"/>
-                <a:ea typeface="宋体" panose="02010600030101010101" pitchFamily="2" charset="-122"/>
-                <a:sym typeface="+mn-ea"/>
-              </a:rPr>
-              <a:t>选择</a:t>
-            </a:r>
-            <a:endParaRPr lang="zh-CN" altLang="en-US" sz="1400" b="1">
+            <a:pPr lvl="0" algn="ctr">
+              <a:buClrTx/>
+              <a:buSzTx/>
+              <a:buFontTx/>
+            </a:pPr>
+            <a:endParaRPr lang="en-US" altLang="zh-CN" sz="1400">
               <a:solidFill>
                 <a:schemeClr val="tx1"/>
               </a:solidFill>
@@ -3952,14 +4565,14 @@
       </p:sp>
       <p:sp>
         <p:nvSpPr>
-          <p:cNvPr id="99" name="文本框 98"/>
+          <p:cNvPr id="73" name="文本框 72"/>
           <p:cNvSpPr txBox="1"/>
           <p:nvPr/>
         </p:nvSpPr>
         <p:spPr>
           <a:xfrm>
-            <a:off x="3127375" y="2022475"/>
-            <a:ext cx="5290820" cy="306705"/>
+            <a:off x="2951480" y="582295"/>
+            <a:ext cx="5419725" cy="337185"/>
           </a:xfrm>
           <a:prstGeom prst="rect">
             <a:avLst/>
@@ -3973,14 +4586,22 @@
           <a:p>
             <a:pPr algn="ctr"/>
             <a:r>
-              <a:rPr lang="zh-CN" sz="1400" b="1">
+              <a:rPr lang="zh-CN" altLang="en-US" sz="1600">
                 <a:latin typeface="宋体" panose="02010600030101010101" pitchFamily="2" charset="-122"/>
                 <a:ea typeface="宋体" panose="02010600030101010101" pitchFamily="2" charset="-122"/>
                 <a:sym typeface="+mn-ea"/>
               </a:rPr>
-              <a:t>感知驱动细分因子计算</a:t>
-            </a:r>
-            <a:endParaRPr lang="zh-CN" sz="1400" b="1">
+              <a:t>状态上下文构建模块</a:t>
+            </a:r>
+            <a:r>
+              <a:rPr lang="en-US" altLang="zh-CN" sz="1600">
+                <a:latin typeface="宋体" panose="02010600030101010101" pitchFamily="2" charset="-122"/>
+                <a:ea typeface="宋体" panose="02010600030101010101" pitchFamily="2" charset="-122"/>
+                <a:sym typeface="+mn-ea"/>
+              </a:rPr>
+              <a:t>  </a:t>
+            </a:r>
+            <a:endParaRPr lang="en-US" altLang="zh-CN" sz="1600">
               <a:solidFill>
                 <a:schemeClr val="tx1"/>
               </a:solidFill>
@@ -3993,14 +4614,14 @@
       </p:sp>
       <p:sp>
         <p:nvSpPr>
-          <p:cNvPr id="102" name="文本框 101"/>
+          <p:cNvPr id="74" name="文本框 73"/>
           <p:cNvSpPr txBox="1"/>
           <p:nvPr/>
         </p:nvSpPr>
         <p:spPr>
           <a:xfrm>
-            <a:off x="3134995" y="2787015"/>
-            <a:ext cx="5411470" cy="306705"/>
+            <a:off x="2951480" y="1414145"/>
+            <a:ext cx="5290820" cy="337185"/>
           </a:xfrm>
           <a:prstGeom prst="rect">
             <a:avLst/>
@@ -4014,22 +4635,22 @@
           <a:p>
             <a:pPr algn="ctr"/>
             <a:r>
-              <a:rPr lang="en-US" altLang="zh-CN" sz="1400" b="1">
+              <a:rPr lang="zh-CN" altLang="en-US" sz="1600">
                 <a:latin typeface="宋体" panose="02010600030101010101" pitchFamily="2" charset="-122"/>
                 <a:ea typeface="宋体" panose="02010600030101010101" pitchFamily="2" charset="-122"/>
                 <a:sym typeface="+mn-ea"/>
               </a:rPr>
-              <a:t>GPU</a:t>
-            </a:r>
-            <a:r>
-              <a:rPr lang="zh-CN" altLang="en-US" sz="1400" b="1">
+              <a:t>感知临界分辨率求解模块</a:t>
+            </a:r>
+            <a:r>
+              <a:rPr lang="en-US" altLang="zh-CN" sz="1600">
                 <a:latin typeface="宋体" panose="02010600030101010101" pitchFamily="2" charset="-122"/>
                 <a:ea typeface="宋体" panose="02010600030101010101" pitchFamily="2" charset="-122"/>
                 <a:sym typeface="+mn-ea"/>
               </a:rPr>
-              <a:t>自适应细分</a:t>
-            </a:r>
-            <a:endParaRPr lang="zh-CN" altLang="en-US" sz="1400" b="1">
+              <a:t> </a:t>
+            </a:r>
+            <a:endParaRPr lang="zh-CN" altLang="en-US" sz="1600">
               <a:solidFill>
                 <a:schemeClr val="tx1"/>
               </a:solidFill>
@@ -4042,14 +4663,14 @@
       </p:sp>
       <p:sp>
         <p:nvSpPr>
-          <p:cNvPr id="104" name="文本框 103"/>
+          <p:cNvPr id="75" name="文本框 74"/>
           <p:cNvSpPr txBox="1"/>
           <p:nvPr/>
         </p:nvSpPr>
         <p:spPr>
           <a:xfrm>
-            <a:off x="3134995" y="3413125"/>
-            <a:ext cx="5412740" cy="306705"/>
+            <a:off x="2959100" y="2186940"/>
+            <a:ext cx="5411470" cy="337185"/>
           </a:xfrm>
           <a:prstGeom prst="rect">
             <a:avLst/>
@@ -4063,17 +4684,14 @@
           <a:p>
             <a:pPr algn="ctr"/>
             <a:r>
-              <a:rPr lang="zh-CN" altLang="en-US" sz="1400" b="1">
-                <a:solidFill>
-                  <a:schemeClr val="tx1"/>
-                </a:solidFill>
+              <a:rPr lang="zh-CN" altLang="en-US" sz="1600">
                 <a:latin typeface="宋体" panose="02010600030101010101" pitchFamily="2" charset="-122"/>
                 <a:ea typeface="宋体" panose="02010600030101010101" pitchFamily="2" charset="-122"/>
                 <a:sym typeface="+mn-ea"/>
               </a:rPr>
-              <a:t>纹理处理与过渡</a:t>
-            </a:r>
-            <a:endParaRPr lang="zh-CN" altLang="en-US" sz="1400" b="1">
+              <a:t>分辨率缩因子计算模块</a:t>
+            </a:r>
+            <a:endParaRPr lang="zh-CN" altLang="en-US" sz="1600">
               <a:solidFill>
                 <a:schemeClr val="tx1"/>
               </a:solidFill>
@@ -4086,14 +4704,14 @@
       </p:sp>
       <p:sp>
         <p:nvSpPr>
-          <p:cNvPr id="109" name="文本框 108"/>
+          <p:cNvPr id="84" name="文本框 83"/>
           <p:cNvSpPr txBox="1"/>
           <p:nvPr/>
         </p:nvSpPr>
         <p:spPr>
           <a:xfrm>
-            <a:off x="3134995" y="5133340"/>
-            <a:ext cx="1576070" cy="521970"/>
+            <a:off x="2959100" y="2813050"/>
+            <a:ext cx="5412740" cy="337185"/>
           </a:xfrm>
           <a:prstGeom prst="rect">
             <a:avLst/>
@@ -4105,40 +4723,16 @@
             <a:spAutoFit/>
           </a:bodyPr>
           <a:p>
-            <a:pPr algn="l"/>
-            <a:r>
-              <a:rPr lang="zh-CN" altLang="en-US" sz="1400" b="1">
+            <a:pPr algn="ctr"/>
+            <a:r>
+              <a:rPr lang="zh-CN" altLang="en-US" sz="1600">
                 <a:latin typeface="宋体" panose="02010600030101010101" pitchFamily="2" charset="-122"/>
                 <a:ea typeface="宋体" panose="02010600030101010101" pitchFamily="2" charset="-122"/>
                 <a:sym typeface="+mn-ea"/>
               </a:rPr>
-              <a:t>动态多分辨率场</a:t>
-            </a:r>
-            <a:endParaRPr lang="zh-CN" altLang="en-US" sz="1400" b="1">
-              <a:latin typeface="宋体" panose="02010600030101010101" pitchFamily="2" charset="-122"/>
-              <a:ea typeface="宋体" panose="02010600030101010101" pitchFamily="2" charset="-122"/>
-              <a:sym typeface="+mn-ea"/>
-            </a:endParaRPr>
-          </a:p>
-          <a:p>
-            <a:pPr algn="l"/>
-            <a:r>
-              <a:rPr lang="en-US" altLang="zh-CN" sz="1400" b="1">
-                <a:latin typeface="宋体" panose="02010600030101010101" pitchFamily="2" charset="-122"/>
-                <a:ea typeface="宋体" panose="02010600030101010101" pitchFamily="2" charset="-122"/>
-                <a:sym typeface="+mn-ea"/>
-              </a:rPr>
-              <a:t>  </a:t>
-            </a:r>
-            <a:r>
-              <a:rPr lang="zh-CN" altLang="en-US" sz="1400" b="1">
-                <a:latin typeface="宋体" panose="02010600030101010101" pitchFamily="2" charset="-122"/>
-                <a:ea typeface="宋体" panose="02010600030101010101" pitchFamily="2" charset="-122"/>
-                <a:sym typeface="+mn-ea"/>
-              </a:rPr>
-              <a:t>构建模块</a:t>
-            </a:r>
-            <a:endParaRPr lang="zh-CN" altLang="en-US" sz="1400" b="1">
+              <a:t>时空分辨率调度器</a:t>
+            </a:r>
+            <a:endParaRPr lang="zh-CN" altLang="en-US" sz="1600">
               <a:solidFill>
                 <a:schemeClr val="tx1"/>
               </a:solidFill>
@@ -4149,9 +4743,74 @@
           </a:p>
         </p:txBody>
       </p:sp>
+      <p:sp>
+        <p:nvSpPr>
+          <p:cNvPr id="95" name="文本框 94"/>
+          <p:cNvSpPr txBox="1"/>
+          <p:nvPr/>
+        </p:nvSpPr>
+        <p:spPr>
+          <a:xfrm>
+            <a:off x="2959100" y="4533265"/>
+            <a:ext cx="1719580" cy="583565"/>
+          </a:xfrm>
+          <a:prstGeom prst="rect">
+            <a:avLst/>
+          </a:prstGeom>
+          <a:noFill/>
+        </p:spPr>
+        <p:txBody>
+          <a:bodyPr wrap="square" rtlCol="0">
+            <a:spAutoFit/>
+          </a:bodyPr>
+          <a:p>
+            <a:pPr algn="l"/>
+            <a:r>
+              <a:rPr lang="zh-CN" altLang="en-US" sz="1600">
+                <a:latin typeface="宋体" panose="02010600030101010101" pitchFamily="2" charset="-122"/>
+                <a:ea typeface="宋体" panose="02010600030101010101" pitchFamily="2" charset="-122"/>
+                <a:sym typeface="+mn-ea"/>
+              </a:rPr>
+              <a:t>动态多分辨率场</a:t>
+            </a:r>
+            <a:endParaRPr lang="zh-CN" altLang="en-US" sz="1600">
+              <a:latin typeface="宋体" panose="02010600030101010101" pitchFamily="2" charset="-122"/>
+              <a:ea typeface="宋体" panose="02010600030101010101" pitchFamily="2" charset="-122"/>
+              <a:sym typeface="+mn-ea"/>
+            </a:endParaRPr>
+          </a:p>
+          <a:p>
+            <a:pPr algn="l"/>
+            <a:r>
+              <a:rPr lang="en-US" altLang="zh-CN" sz="1600">
+                <a:latin typeface="宋体" panose="02010600030101010101" pitchFamily="2" charset="-122"/>
+                <a:ea typeface="宋体" panose="02010600030101010101" pitchFamily="2" charset="-122"/>
+                <a:sym typeface="+mn-ea"/>
+              </a:rPr>
+              <a:t>  </a:t>
+            </a:r>
+            <a:r>
+              <a:rPr lang="zh-CN" altLang="en-US" sz="1600">
+                <a:latin typeface="宋体" panose="02010600030101010101" pitchFamily="2" charset="-122"/>
+                <a:ea typeface="宋体" panose="02010600030101010101" pitchFamily="2" charset="-122"/>
+                <a:sym typeface="+mn-ea"/>
+              </a:rPr>
+              <a:t>构建模块</a:t>
+            </a:r>
+            <a:endParaRPr lang="zh-CN" altLang="en-US" sz="1600">
+              <a:solidFill>
+                <a:schemeClr val="tx1"/>
+              </a:solidFill>
+              <a:latin typeface="宋体" panose="02010600030101010101" pitchFamily="2" charset="-122"/>
+              <a:ea typeface="宋体" panose="02010600030101010101" pitchFamily="2" charset="-122"/>
+              <a:sym typeface="+mn-ea"/>
+            </a:endParaRPr>
+          </a:p>
+        </p:txBody>
+      </p:sp>
       <p:pic>
         <p:nvPicPr>
-          <p:cNvPr id="119" name="图片 118"/>
+          <p:cNvPr id="101" name="图片 100"/>
           <p:cNvPicPr>
             <a:picLocks noChangeAspect="1"/>
           </p:cNvPicPr>
@@ -4165,7 +4824,7 @@
         </p:blipFill>
         <p:spPr>
           <a:xfrm>
-            <a:off x="6068695" y="4859655"/>
+            <a:off x="5892800" y="4259580"/>
             <a:ext cx="1289685" cy="1000125"/>
           </a:xfrm>
           <a:prstGeom prst="rect">
@@ -4175,14 +4834,14 @@
       </p:pic>
       <p:sp>
         <p:nvSpPr>
-          <p:cNvPr id="121" name="文本框 120"/>
+          <p:cNvPr id="110" name="文本框 109"/>
           <p:cNvSpPr txBox="1"/>
           <p:nvPr/>
         </p:nvSpPr>
         <p:spPr>
           <a:xfrm>
-            <a:off x="5389245" y="5222240"/>
-            <a:ext cx="1448435" cy="306705"/>
+            <a:off x="5213350" y="4622165"/>
+            <a:ext cx="1448435" cy="337185"/>
           </a:xfrm>
           <a:prstGeom prst="rect">
             <a:avLst/>
@@ -4196,14 +4855,14 @@
           <a:p>
             <a:pPr algn="l"/>
             <a:r>
-              <a:rPr lang="zh-CN" altLang="en-US" sz="1400" b="1">
+              <a:rPr lang="zh-CN" altLang="en-US" sz="1600">
                 <a:latin typeface="宋体" panose="02010600030101010101" pitchFamily="2" charset="-122"/>
                 <a:ea typeface="宋体" panose="02010600030101010101" pitchFamily="2" charset="-122"/>
                 <a:sym typeface="+mn-ea"/>
               </a:rPr>
               <a:t>注视点</a:t>
             </a:r>
-            <a:endParaRPr lang="zh-CN" altLang="en-US" sz="1400" b="1">
+            <a:endParaRPr lang="zh-CN" altLang="en-US" sz="1600">
               <a:latin typeface="宋体" panose="02010600030101010101" pitchFamily="2" charset="-122"/>
               <a:ea typeface="宋体" panose="02010600030101010101" pitchFamily="2" charset="-122"/>
               <a:sym typeface="+mn-ea"/>
@@ -4213,14 +4872,14 @@
       </p:sp>
       <p:sp>
         <p:nvSpPr>
-          <p:cNvPr id="122" name="文本框 121"/>
+          <p:cNvPr id="111" name="文本框 110"/>
           <p:cNvSpPr txBox="1"/>
           <p:nvPr/>
         </p:nvSpPr>
         <p:spPr>
           <a:xfrm>
-            <a:off x="7306945" y="4909185"/>
-            <a:ext cx="1448435" cy="306705"/>
+            <a:off x="7131050" y="4309110"/>
+            <a:ext cx="1448435" cy="337185"/>
           </a:xfrm>
           <a:prstGeom prst="rect">
             <a:avLst/>
@@ -4234,14 +4893,14 @@
           <a:p>
             <a:pPr algn="l"/>
             <a:r>
-              <a:rPr lang="zh-CN" altLang="en-US" sz="1400" b="1">
+              <a:rPr lang="zh-CN" altLang="en-US" sz="1600">
                 <a:latin typeface="宋体" panose="02010600030101010101" pitchFamily="2" charset="-122"/>
                 <a:ea typeface="宋体" panose="02010600030101010101" pitchFamily="2" charset="-122"/>
                 <a:sym typeface="+mn-ea"/>
               </a:rPr>
               <a:t>偏心度</a:t>
             </a:r>
-            <a:endParaRPr lang="zh-CN" altLang="en-US" sz="1400" b="1">
+            <a:endParaRPr lang="zh-CN" altLang="en-US" sz="1600">
               <a:latin typeface="宋体" panose="02010600030101010101" pitchFamily="2" charset="-122"/>
               <a:ea typeface="宋体" panose="02010600030101010101" pitchFamily="2" charset="-122"/>
               <a:sym typeface="+mn-ea"/>
@@ -4251,14 +4910,14 @@
       </p:sp>
       <p:sp>
         <p:nvSpPr>
-          <p:cNvPr id="126" name="文本框 125"/>
+          <p:cNvPr id="112" name="文本框 111"/>
           <p:cNvSpPr txBox="1"/>
           <p:nvPr/>
         </p:nvSpPr>
         <p:spPr>
           <a:xfrm>
-            <a:off x="7335520" y="5541010"/>
-            <a:ext cx="1448435" cy="306705"/>
+            <a:off x="7159625" y="4940935"/>
+            <a:ext cx="1448435" cy="337185"/>
           </a:xfrm>
           <a:prstGeom prst="rect">
             <a:avLst/>
@@ -4272,14 +4931,14 @@
           <a:p>
             <a:pPr algn="l"/>
             <a:r>
-              <a:rPr lang="zh-CN" altLang="en-US" sz="1400" b="1">
+              <a:rPr lang="zh-CN" altLang="en-US" sz="1600">
                 <a:latin typeface="宋体" panose="02010600030101010101" pitchFamily="2" charset="-122"/>
                 <a:ea typeface="宋体" panose="02010600030101010101" pitchFamily="2" charset="-122"/>
                 <a:sym typeface="+mn-ea"/>
               </a:rPr>
               <a:t>偏心度</a:t>
             </a:r>
-            <a:endParaRPr lang="zh-CN" altLang="en-US" sz="1400" b="1">
+            <a:endParaRPr lang="zh-CN" altLang="en-US" sz="1600">
               <a:latin typeface="宋体" panose="02010600030101010101" pitchFamily="2" charset="-122"/>
               <a:ea typeface="宋体" panose="02010600030101010101" pitchFamily="2" charset="-122"/>
               <a:sym typeface="+mn-ea"/>
@@ -4289,20 +4948,20 @@
       </p:sp>
       <p:sp>
         <p:nvSpPr>
-          <p:cNvPr id="127" name="矩形 126"/>
+          <p:cNvPr id="113" name="矩形 112"/>
           <p:cNvSpPr/>
           <p:nvPr/>
         </p:nvSpPr>
         <p:spPr>
           <a:xfrm>
-            <a:off x="3127375" y="6115685"/>
+            <a:off x="2951480" y="5515610"/>
             <a:ext cx="5412105" cy="459740"/>
           </a:xfrm>
           <a:prstGeom prst="rect">
             <a:avLst/>
           </a:prstGeom>
           <a:solidFill>
-            <a:srgbClr val="D9E7F1"/>
+            <a:srgbClr val="D8E3F1"/>
           </a:solidFill>
           <a:ln>
             <a:solidFill>
@@ -4325,9 +4984,99 @@
           </a:fontRef>
         </p:style>
         <p:txBody>
-          <a:bodyPr rtlCol="0" anchor="ctr"/>
+          <a:bodyPr vertOverflow="overflow" horzOverflow="overflow" vert="horz" wrap="square" numCol="1" spcCol="0" rtlCol="0" fromWordArt="0" anchor="ctr" anchorCtr="0" forceAA="0" compatLnSpc="1">
+            <a:noAutofit/>
+          </a:bodyPr>
+          <a:p>
+            <a:pPr lvl="0" algn="ctr">
+              <a:buClrTx/>
+              <a:buSzTx/>
+              <a:buFontTx/>
+            </a:pPr>
+            <a:endParaRPr lang="en-US" altLang="zh-CN" sz="1400">
+              <a:solidFill>
+                <a:schemeClr val="tx1"/>
+              </a:solidFill>
+              <a:latin typeface="宋体" panose="02010600030101010101" pitchFamily="2" charset="-122"/>
+              <a:ea typeface="宋体" panose="02010600030101010101" pitchFamily="2" charset="-122"/>
+              <a:sym typeface="+mn-ea"/>
+            </a:endParaRPr>
+          </a:p>
+        </p:txBody>
+      </p:sp>
+      <p:sp>
+        <p:nvSpPr>
+          <p:cNvPr id="114" name="文本框 113"/>
+          <p:cNvSpPr txBox="1"/>
+          <p:nvPr/>
+        </p:nvSpPr>
+        <p:spPr>
+          <a:xfrm>
+            <a:off x="2951480" y="5581015"/>
+            <a:ext cx="5411470" cy="337185"/>
+          </a:xfrm>
+          <a:prstGeom prst="rect">
+            <a:avLst/>
+          </a:prstGeom>
+          <a:noFill/>
+        </p:spPr>
+        <p:txBody>
+          <a:bodyPr wrap="square" rtlCol="0">
+            <a:spAutoFit/>
+          </a:bodyPr>
           <a:p>
             <a:pPr algn="ctr"/>
+            <a:r>
+              <a:rPr lang="zh-CN" altLang="en-US" sz="1600">
+                <a:solidFill>
+                  <a:schemeClr val="tx1"/>
+                </a:solidFill>
+                <a:latin typeface="宋体" panose="02010600030101010101" pitchFamily="2" charset="-122"/>
+                <a:ea typeface="宋体" panose="02010600030101010101" pitchFamily="2" charset="-122"/>
+              </a:rPr>
+              <a:t>渲染管线集成模块</a:t>
+            </a:r>
+            <a:endParaRPr lang="zh-CN" altLang="en-US" sz="1600">
+              <a:solidFill>
+                <a:schemeClr val="tx1"/>
+              </a:solidFill>
+              <a:latin typeface="宋体" panose="02010600030101010101" pitchFamily="2" charset="-122"/>
+              <a:ea typeface="宋体" panose="02010600030101010101" pitchFamily="2" charset="-122"/>
+            </a:endParaRPr>
+          </a:p>
+        </p:txBody>
+      </p:sp>
+      <p:sp>
+        <p:nvSpPr>
+          <p:cNvPr id="115" name="文本框 114"/>
+          <p:cNvSpPr txBox="1"/>
+          <p:nvPr/>
+        </p:nvSpPr>
+        <p:spPr>
+          <a:xfrm>
+            <a:off x="9709785" y="152400"/>
+            <a:ext cx="1579880" cy="352425"/>
+          </a:xfrm>
+          <a:prstGeom prst="rect">
+            <a:avLst/>
+          </a:prstGeom>
+          <a:noFill/>
+        </p:spPr>
+        <p:txBody>
+          <a:bodyPr wrap="square" rtlCol="0">
+            <a:spAutoFit/>
+          </a:bodyPr>
+          <a:p>
+            <a:r>
+              <a:rPr lang="zh-CN" altLang="en-US" sz="1700" b="1">
+                <a:solidFill>
+                  <a:schemeClr val="tx1"/>
+                </a:solidFill>
+                <a:latin typeface="宋体" panose="02010600030101010101" pitchFamily="2" charset="-122"/>
+                <a:ea typeface="宋体" panose="02010600030101010101" pitchFamily="2" charset="-122"/>
+              </a:rPr>
+              <a:t>输出模块</a:t>
+            </a:r>
             <a:endParaRPr lang="zh-CN" altLang="en-US" sz="1400" b="1">
               <a:solidFill>
                 <a:schemeClr val="tx1"/>
@@ -4340,14 +5089,14 @@
       </p:sp>
       <p:sp>
         <p:nvSpPr>
-          <p:cNvPr id="128" name="文本框 127"/>
+          <p:cNvPr id="116" name="文本框 115"/>
           <p:cNvSpPr txBox="1"/>
           <p:nvPr/>
         </p:nvSpPr>
         <p:spPr>
           <a:xfrm>
-            <a:off x="3127375" y="6181090"/>
-            <a:ext cx="5411470" cy="306705"/>
+            <a:off x="4805680" y="134620"/>
+            <a:ext cx="1864995" cy="352425"/>
           </a:xfrm>
           <a:prstGeom prst="rect">
             <a:avLst/>
@@ -4359,18 +5108,138 @@
             <a:spAutoFit/>
           </a:bodyPr>
           <a:p>
-            <a:pPr algn="ctr"/>
-            <a:r>
-              <a:rPr lang="zh-CN" altLang="en-US" sz="1400" b="1">
-                <a:solidFill>
-                  <a:schemeClr val="tx1"/>
-                </a:solidFill>
+            <a:pPr lvl="0" algn="l">
+              <a:buClrTx/>
+              <a:buSzTx/>
+              <a:buFontTx/>
+            </a:pPr>
+            <a:r>
+              <a:rPr lang="zh-CN" altLang="en-US" sz="1700" b="1">
                 <a:latin typeface="宋体" panose="02010600030101010101" pitchFamily="2" charset="-122"/>
                 <a:ea typeface="宋体" panose="02010600030101010101" pitchFamily="2" charset="-122"/>
+                <a:sym typeface="+mn-ea"/>
               </a:rPr>
-              <a:t>渲染管线集成模块</a:t>
-            </a:r>
-            <a:endParaRPr lang="zh-CN" altLang="en-US" sz="1400" b="1">
+              <a:t>核心处理流水线</a:t>
+            </a:r>
+            <a:endParaRPr lang="zh-CN" altLang="en-US" sz="1700" b="1">
+              <a:latin typeface="宋体" panose="02010600030101010101" pitchFamily="2" charset="-122"/>
+              <a:ea typeface="宋体" panose="02010600030101010101" pitchFamily="2" charset="-122"/>
+              <a:sym typeface="+mn-ea"/>
+            </a:endParaRPr>
+          </a:p>
+        </p:txBody>
+      </p:sp>
+      <p:sp>
+        <p:nvSpPr>
+          <p:cNvPr id="117" name="矩形 116"/>
+          <p:cNvSpPr/>
+          <p:nvPr/>
+        </p:nvSpPr>
+        <p:spPr>
+          <a:xfrm>
+            <a:off x="9152890" y="505460"/>
+            <a:ext cx="2082165" cy="459740"/>
+          </a:xfrm>
+          <a:prstGeom prst="rect">
+            <a:avLst/>
+          </a:prstGeom>
+          <a:solidFill>
+            <a:srgbClr val="BFD8EC"/>
+          </a:solidFill>
+          <a:ln>
+            <a:solidFill>
+              <a:srgbClr val="BDD6EC"/>
+            </a:solidFill>
+          </a:ln>
+        </p:spPr>
+        <p:style>
+          <a:lnRef idx="0">
+            <a:srgbClr val="FFFFFF"/>
+          </a:lnRef>
+          <a:fillRef idx="1">
+            <a:schemeClr val="accent1"/>
+          </a:fillRef>
+          <a:effectRef idx="0">
+            <a:srgbClr val="FFFFFF"/>
+          </a:effectRef>
+          <a:fontRef idx="minor">
+            <a:schemeClr val="lt1"/>
+          </a:fontRef>
+        </p:style>
+        <p:txBody>
+          <a:bodyPr vertOverflow="overflow" horzOverflow="overflow" vert="horz" wrap="square" numCol="1" spcCol="0" rtlCol="0" fromWordArt="0" anchor="ctr" anchorCtr="0" forceAA="0" compatLnSpc="1">
+            <a:noAutofit/>
+          </a:bodyPr>
+          <a:p>
+            <a:pPr lvl="0" algn="ctr">
+              <a:buClrTx/>
+              <a:buSzTx/>
+              <a:buFontTx/>
+            </a:pPr>
+            <a:r>
+              <a:rPr lang="en-US" altLang="zh-CN" sz="1600">
+                <a:solidFill>
+                  <a:schemeClr val="tx1"/>
+                </a:solidFill>
+                <a:latin typeface="宋体" panose="02010600030101010101" pitchFamily="2" charset="-122"/>
+                <a:ea typeface="宋体" panose="02010600030101010101" pitchFamily="2" charset="-122"/>
+                <a:sym typeface="+mn-ea"/>
+              </a:rPr>
+              <a:t>多分辨率渲染结果</a:t>
+            </a:r>
+            <a:endParaRPr lang="en-US" altLang="zh-CN" sz="1600">
+              <a:solidFill>
+                <a:schemeClr val="tx1"/>
+              </a:solidFill>
+              <a:latin typeface="宋体" panose="02010600030101010101" pitchFamily="2" charset="-122"/>
+              <a:ea typeface="宋体" panose="02010600030101010101" pitchFamily="2" charset="-122"/>
+              <a:sym typeface="+mn-ea"/>
+            </a:endParaRPr>
+          </a:p>
+        </p:txBody>
+      </p:sp>
+      <p:sp>
+        <p:nvSpPr>
+          <p:cNvPr id="118" name="矩形 117"/>
+          <p:cNvSpPr/>
+          <p:nvPr/>
+        </p:nvSpPr>
+        <p:spPr>
+          <a:xfrm>
+            <a:off x="9152890" y="965200"/>
+            <a:ext cx="2082165" cy="3023870"/>
+          </a:xfrm>
+          <a:prstGeom prst="rect">
+            <a:avLst/>
+          </a:prstGeom>
+          <a:solidFill>
+            <a:srgbClr val="FFFFFF"/>
+          </a:solidFill>
+          <a:ln>
+            <a:solidFill>
+              <a:srgbClr val="BDD6EC"/>
+            </a:solidFill>
+          </a:ln>
+        </p:spPr>
+        <p:style>
+          <a:lnRef idx="0">
+            <a:srgbClr val="FFFFFF"/>
+          </a:lnRef>
+          <a:fillRef idx="1">
+            <a:schemeClr val="accent1"/>
+          </a:fillRef>
+          <a:effectRef idx="0">
+            <a:srgbClr val="FFFFFF"/>
+          </a:effectRef>
+          <a:fontRef idx="minor">
+            <a:schemeClr val="lt1"/>
+          </a:fontRef>
+        </p:style>
+        <p:txBody>
+          <a:bodyPr rtlCol="0" anchor="ctr"/>
+          <a:p>
+            <a:pPr algn="l"/>
+            <a:endParaRPr lang="zh-CN" altLang="en-US" sz="1300">
               <a:solidFill>
                 <a:schemeClr val="tx1"/>
               </a:solidFill>
@@ -4380,98 +5249,385 @@
           </a:p>
         </p:txBody>
       </p:sp>
-      <p:sp>
-        <p:nvSpPr>
-          <p:cNvPr id="129" name="文本框 128"/>
-          <p:cNvSpPr txBox="1"/>
+      <p:pic>
+        <p:nvPicPr>
+          <p:cNvPr id="120" name="图片 119"/>
+          <p:cNvPicPr>
+            <a:picLocks noChangeAspect="1"/>
+          </p:cNvPicPr>
           <p:nvPr/>
-        </p:nvSpPr>
-        <p:spPr>
-          <a:xfrm>
-            <a:off x="9930130" y="761365"/>
-            <a:ext cx="1579880" cy="337185"/>
+        </p:nvPicPr>
+        <p:blipFill>
+          <a:blip r:embed="rId2"/>
+          <a:stretch>
+            <a:fillRect/>
+          </a:stretch>
+        </p:blipFill>
+        <p:spPr>
+          <a:xfrm>
+            <a:off x="9171940" y="972820"/>
+            <a:ext cx="2053590" cy="2953385"/>
           </a:xfrm>
           <a:prstGeom prst="rect">
             <a:avLst/>
           </a:prstGeom>
-          <a:noFill/>
-        </p:spPr>
-        <p:txBody>
-          <a:bodyPr wrap="square" rtlCol="0">
-            <a:spAutoFit/>
+        </p:spPr>
+      </p:pic>
+      <p:sp>
+        <p:nvSpPr>
+          <p:cNvPr id="123" name="矩形 122"/>
+          <p:cNvSpPr/>
+          <p:nvPr/>
+        </p:nvSpPr>
+        <p:spPr>
+          <a:xfrm>
+            <a:off x="9162415" y="4317365"/>
+            <a:ext cx="2072640" cy="459740"/>
+          </a:xfrm>
+          <a:prstGeom prst="rect">
+            <a:avLst/>
+          </a:prstGeom>
+          <a:solidFill>
+            <a:srgbClr val="BFD8EC"/>
+          </a:solidFill>
+          <a:ln>
+            <a:solidFill>
+              <a:srgbClr val="BDD6EC"/>
+            </a:solidFill>
+          </a:ln>
+        </p:spPr>
+        <p:style>
+          <a:lnRef idx="0">
+            <a:srgbClr val="FFFFFF"/>
+          </a:lnRef>
+          <a:fillRef idx="1">
+            <a:schemeClr val="accent1"/>
+          </a:fillRef>
+          <a:effectRef idx="0">
+            <a:srgbClr val="FFFFFF"/>
+          </a:effectRef>
+          <a:fontRef idx="minor">
+            <a:schemeClr val="lt1"/>
+          </a:fontRef>
+        </p:style>
+        <p:txBody>
+          <a:bodyPr vertOverflow="overflow" horzOverflow="overflow" vert="horz" wrap="square" numCol="1" spcCol="0" rtlCol="0" fromWordArt="0" anchor="ctr" anchorCtr="0" forceAA="0" compatLnSpc="1">
+            <a:noAutofit/>
           </a:bodyPr>
           <a:p>
-            <a:r>
-              <a:rPr lang="zh-CN" altLang="en-US" sz="1600" b="1">
+            <a:pPr lvl="0" algn="ctr">
+              <a:buClrTx/>
+              <a:buSzTx/>
+              <a:buFontTx/>
+            </a:pPr>
+            <a:r>
+              <a:rPr lang="en-US" altLang="zh-CN" sz="1600">
                 <a:solidFill>
                   <a:schemeClr val="tx1"/>
                 </a:solidFill>
                 <a:latin typeface="宋体" panose="02010600030101010101" pitchFamily="2" charset="-122"/>
                 <a:ea typeface="宋体" panose="02010600030101010101" pitchFamily="2" charset="-122"/>
+                <a:sym typeface="+mn-ea"/>
               </a:rPr>
-              <a:t>输出模块</a:t>
-            </a:r>
-            <a:endParaRPr lang="zh-CN" altLang="en-US" sz="1600" b="1">
+              <a:t>性能指标</a:t>
+            </a:r>
+            <a:endParaRPr lang="en-US" altLang="zh-CN" sz="1600">
               <a:solidFill>
                 <a:schemeClr val="tx1"/>
               </a:solidFill>
               <a:latin typeface="宋体" panose="02010600030101010101" pitchFamily="2" charset="-122"/>
               <a:ea typeface="宋体" panose="02010600030101010101" pitchFamily="2" charset="-122"/>
+              <a:sym typeface="+mn-ea"/>
             </a:endParaRPr>
           </a:p>
         </p:txBody>
       </p:sp>
       <p:sp>
         <p:nvSpPr>
-          <p:cNvPr id="130" name="文本框 129"/>
-          <p:cNvSpPr txBox="1"/>
+          <p:cNvPr id="124" name="矩形 123"/>
+          <p:cNvSpPr/>
           <p:nvPr/>
         </p:nvSpPr>
         <p:spPr>
           <a:xfrm>
-            <a:off x="5186680" y="743585"/>
-            <a:ext cx="1902460" cy="337185"/>
+            <a:off x="9162415" y="4777105"/>
+            <a:ext cx="2072640" cy="1195705"/>
           </a:xfrm>
           <a:prstGeom prst="rect">
             <a:avLst/>
           </a:prstGeom>
-          <a:noFill/>
-        </p:spPr>
-        <p:txBody>
-          <a:bodyPr wrap="square" rtlCol="0">
-            <a:spAutoFit/>
-          </a:bodyPr>
-          <a:p>
-            <a:r>
-              <a:rPr lang="zh-CN" altLang="en-US" sz="1600" b="1">
-                <a:solidFill>
-                  <a:schemeClr val="tx1"/>
-                </a:solidFill>
-                <a:latin typeface="宋体" panose="02010600030101010101" pitchFamily="2" charset="-122"/>
-                <a:ea typeface="宋体" panose="02010600030101010101" pitchFamily="2" charset="-122"/>
-              </a:rPr>
-              <a:t>核心处理流水线</a:t>
-            </a:r>
-            <a:endParaRPr lang="zh-CN" altLang="en-US" sz="1600" b="1">
+          <a:solidFill>
+            <a:srgbClr val="FFFFFF"/>
+          </a:solidFill>
+          <a:ln>
+            <a:solidFill>
+              <a:srgbClr val="BDD6EC"/>
+            </a:solidFill>
+          </a:ln>
+        </p:spPr>
+        <p:style>
+          <a:lnRef idx="0">
+            <a:srgbClr val="FFFFFF"/>
+          </a:lnRef>
+          <a:fillRef idx="1">
+            <a:schemeClr val="accent1"/>
+          </a:fillRef>
+          <a:effectRef idx="0">
+            <a:srgbClr val="FFFFFF"/>
+          </a:effectRef>
+          <a:fontRef idx="minor">
+            <a:schemeClr val="lt1"/>
+          </a:fontRef>
+        </p:style>
+        <p:txBody>
+          <a:bodyPr rtlCol="0" anchor="ctr"/>
+          <a:p>
+            <a:pPr algn="ctr"/>
+            <a:endParaRPr lang="zh-CN" altLang="en-US" sz="1300">
               <a:solidFill>
                 <a:schemeClr val="tx1"/>
               </a:solidFill>
               <a:latin typeface="宋体" panose="02010600030101010101" pitchFamily="2" charset="-122"/>
               <a:ea typeface="宋体" panose="02010600030101010101" pitchFamily="2" charset="-122"/>
+              <a:sym typeface="+mn-ea"/>
             </a:endParaRPr>
           </a:p>
         </p:txBody>
       </p:sp>
       <p:sp>
         <p:nvSpPr>
-          <p:cNvPr id="131" name="矩形 130"/>
-          <p:cNvSpPr/>
+          <p:cNvPr id="125" name="文本框 124"/>
+          <p:cNvSpPr txBox="1"/>
           <p:nvPr/>
         </p:nvSpPr>
         <p:spPr>
           <a:xfrm>
-            <a:off x="9328785" y="1105535"/>
-            <a:ext cx="2082165" cy="459740"/>
+            <a:off x="9763760" y="4834255"/>
+            <a:ext cx="892810" cy="337185"/>
+          </a:xfrm>
+          <a:prstGeom prst="rect">
+            <a:avLst/>
+          </a:prstGeom>
+          <a:noFill/>
+        </p:spPr>
+        <p:txBody>
+          <a:bodyPr wrap="square" rtlCol="0">
+            <a:spAutoFit/>
+          </a:bodyPr>
+          <a:p>
+            <a:pPr algn="l"/>
+            <a:r>
+              <a:rPr lang="zh-CN" altLang="en-US" sz="1600">
+                <a:solidFill>
+                  <a:schemeClr val="tx1"/>
+                </a:solidFill>
+                <a:latin typeface="宋体" panose="02010600030101010101" pitchFamily="2" charset="-122"/>
+                <a:ea typeface="宋体" panose="02010600030101010101" pitchFamily="2" charset="-122"/>
+                <a:sym typeface="+mn-ea"/>
+              </a:rPr>
+              <a:t>高帧率</a:t>
+            </a:r>
+            <a:endParaRPr lang="zh-CN" altLang="en-US" sz="1600">
+              <a:solidFill>
+                <a:schemeClr val="tx1"/>
+              </a:solidFill>
+              <a:latin typeface="宋体" panose="02010600030101010101" pitchFamily="2" charset="-122"/>
+              <a:ea typeface="宋体" panose="02010600030101010101" pitchFamily="2" charset="-122"/>
+              <a:sym typeface="+mn-ea"/>
+            </a:endParaRPr>
+          </a:p>
+        </p:txBody>
+      </p:sp>
+      <p:sp>
+        <p:nvSpPr>
+          <p:cNvPr id="142" name="文本框 141"/>
+          <p:cNvSpPr txBox="1"/>
+          <p:nvPr/>
+        </p:nvSpPr>
+        <p:spPr>
+          <a:xfrm>
+            <a:off x="9766935" y="5227955"/>
+            <a:ext cx="892810" cy="337185"/>
+          </a:xfrm>
+          <a:prstGeom prst="rect">
+            <a:avLst/>
+          </a:prstGeom>
+          <a:noFill/>
+        </p:spPr>
+        <p:txBody>
+          <a:bodyPr wrap="square" rtlCol="0">
+            <a:spAutoFit/>
+          </a:bodyPr>
+          <a:p>
+            <a:pPr algn="l"/>
+            <a:r>
+              <a:rPr lang="zh-CN" altLang="en-US" sz="1600">
+                <a:solidFill>
+                  <a:schemeClr val="tx1"/>
+                </a:solidFill>
+                <a:latin typeface="宋体" panose="02010600030101010101" pitchFamily="2" charset="-122"/>
+                <a:ea typeface="宋体" panose="02010600030101010101" pitchFamily="2" charset="-122"/>
+                <a:sym typeface="+mn-ea"/>
+              </a:rPr>
+              <a:t>低延迟</a:t>
+            </a:r>
+            <a:endParaRPr lang="zh-CN" altLang="en-US" sz="1600">
+              <a:solidFill>
+                <a:schemeClr val="tx1"/>
+              </a:solidFill>
+              <a:latin typeface="宋体" panose="02010600030101010101" pitchFamily="2" charset="-122"/>
+              <a:ea typeface="宋体" panose="02010600030101010101" pitchFamily="2" charset="-122"/>
+              <a:sym typeface="+mn-ea"/>
+            </a:endParaRPr>
+          </a:p>
+        </p:txBody>
+      </p:sp>
+      <p:sp>
+        <p:nvSpPr>
+          <p:cNvPr id="143" name="文本框 142"/>
+          <p:cNvSpPr txBox="1"/>
+          <p:nvPr/>
+        </p:nvSpPr>
+        <p:spPr>
+          <a:xfrm>
+            <a:off x="9776460" y="5601335"/>
+            <a:ext cx="1449070" cy="337185"/>
+          </a:xfrm>
+          <a:prstGeom prst="rect">
+            <a:avLst/>
+          </a:prstGeom>
+          <a:noFill/>
+        </p:spPr>
+        <p:txBody>
+          <a:bodyPr wrap="square" rtlCol="0">
+            <a:spAutoFit/>
+          </a:bodyPr>
+          <a:p>
+            <a:pPr algn="l"/>
+            <a:r>
+              <a:rPr lang="en-US" altLang="zh-CN" sz="1600">
+                <a:solidFill>
+                  <a:schemeClr val="tx1"/>
+                </a:solidFill>
+                <a:latin typeface="Times New Roman" panose="02020603050405020304" charset="0"/>
+                <a:ea typeface="宋体" panose="02010600030101010101" pitchFamily="2" charset="-122"/>
+                <a:cs typeface="Times New Roman" panose="02020603050405020304" charset="0"/>
+                <a:sym typeface="+mn-ea"/>
+              </a:rPr>
+              <a:t>GPU</a:t>
+            </a:r>
+            <a:r>
+              <a:rPr lang="zh-CN" altLang="en-US" sz="1600">
+                <a:solidFill>
+                  <a:schemeClr val="tx1"/>
+                </a:solidFill>
+                <a:latin typeface="宋体" panose="02010600030101010101" pitchFamily="2" charset="-122"/>
+                <a:ea typeface="宋体" panose="02010600030101010101" pitchFamily="2" charset="-122"/>
+                <a:sym typeface="+mn-ea"/>
+              </a:rPr>
+              <a:t>负载降低</a:t>
+            </a:r>
+            <a:endParaRPr lang="zh-CN" altLang="en-US" sz="1600">
+              <a:solidFill>
+                <a:schemeClr val="tx1"/>
+              </a:solidFill>
+              <a:latin typeface="宋体" panose="02010600030101010101" pitchFamily="2" charset="-122"/>
+              <a:ea typeface="宋体" panose="02010600030101010101" pitchFamily="2" charset="-122"/>
+              <a:sym typeface="+mn-ea"/>
+            </a:endParaRPr>
+          </a:p>
+        </p:txBody>
+      </p:sp>
+      <p:pic>
+        <p:nvPicPr>
+          <p:cNvPr id="144" name="图片 143"/>
+          <p:cNvPicPr>
+            <a:picLocks noChangeAspect="1"/>
+          </p:cNvPicPr>
+          <p:nvPr/>
+        </p:nvPicPr>
+        <p:blipFill>
+          <a:blip r:embed="rId3"/>
+          <a:stretch>
+            <a:fillRect/>
+          </a:stretch>
+        </p:blipFill>
+        <p:spPr>
+          <a:xfrm>
+            <a:off x="9344660" y="4804410"/>
+            <a:ext cx="409575" cy="337820"/>
+          </a:xfrm>
+          <a:prstGeom prst="rect">
+            <a:avLst/>
+          </a:prstGeom>
+        </p:spPr>
+      </p:pic>
+      <p:pic>
+        <p:nvPicPr>
+          <p:cNvPr id="145" name="图片 144"/>
+          <p:cNvPicPr>
+            <a:picLocks noChangeAspect="1"/>
+          </p:cNvPicPr>
+          <p:nvPr/>
+        </p:nvPicPr>
+        <p:blipFill>
+          <a:blip r:embed="rId4"/>
+          <a:stretch>
+            <a:fillRect/>
+          </a:stretch>
+        </p:blipFill>
+        <p:spPr>
+          <a:xfrm>
+            <a:off x="9386570" y="5180330"/>
+            <a:ext cx="352425" cy="382905"/>
+          </a:xfrm>
+          <a:prstGeom prst="rect">
+            <a:avLst/>
+          </a:prstGeom>
+        </p:spPr>
+      </p:pic>
+      <p:pic>
+        <p:nvPicPr>
+          <p:cNvPr id="146" name="图片 145"/>
+          <p:cNvPicPr>
+            <a:picLocks noChangeAspect="1"/>
+          </p:cNvPicPr>
+          <p:nvPr/>
+        </p:nvPicPr>
+        <p:blipFill>
+          <a:blip r:embed="rId5"/>
+          <a:stretch>
+            <a:fillRect/>
+          </a:stretch>
+        </p:blipFill>
+        <p:spPr>
+          <a:xfrm>
+            <a:off x="9325610" y="5525135"/>
+            <a:ext cx="428625" cy="405130"/>
+          </a:xfrm>
+          <a:prstGeom prst="rect">
+            <a:avLst/>
+          </a:prstGeom>
+        </p:spPr>
+      </p:pic>
+      <p:pic>
+        <p:nvPicPr>
+          <p:cNvPr id="147" name="图片 146"/>
+          <p:cNvPicPr>
+            <a:picLocks noChangeAspect="1"/>
+          </p:cNvPicPr>
+          <p:nvPr/>
+        </p:nvPicPr>
+        <p:blipFill>
+          <a:blip r:embed="rId6"/>
+          <a:stretch>
+            <a:fillRect/>
+          </a:stretch>
+        </p:blipFill>
+        <p:spPr>
+          <a:xfrm>
+            <a:off x="242570" y="587375"/>
+            <a:ext cx="522605" cy="292100"/>
           </a:xfrm>
           <a:prstGeom prst="rect">
             <a:avLst/>
@@ -4485,393 +5641,49 @@
             </a:solidFill>
           </a:ln>
         </p:spPr>
-        <p:style>
-          <a:lnRef idx="0">
-            <a:srgbClr val="FFFFFF"/>
-          </a:lnRef>
-          <a:fillRef idx="1">
-            <a:schemeClr val="accent1"/>
-          </a:fillRef>
-          <a:effectRef idx="0">
-            <a:srgbClr val="FFFFFF"/>
-          </a:effectRef>
-          <a:fontRef idx="minor">
-            <a:schemeClr val="lt1"/>
-          </a:fontRef>
-        </p:style>
-        <p:txBody>
-          <a:bodyPr rtlCol="0" anchor="ctr"/>
-          <a:p>
-            <a:pPr algn="ctr"/>
-            <a:r>
-              <a:rPr lang="zh-CN" altLang="en-US" sz="1400" b="1">
-                <a:solidFill>
-                  <a:schemeClr val="tx1"/>
-                </a:solidFill>
-                <a:latin typeface="宋体" panose="02010600030101010101" pitchFamily="2" charset="-122"/>
-                <a:ea typeface="宋体" panose="02010600030101010101" pitchFamily="2" charset="-122"/>
-              </a:rPr>
-              <a:t>多分辨率渲染结果</a:t>
-            </a:r>
-            <a:endParaRPr lang="zh-CN" altLang="en-US" sz="1400" b="1">
-              <a:solidFill>
-                <a:schemeClr val="tx1"/>
-              </a:solidFill>
-              <a:latin typeface="宋体" panose="02010600030101010101" pitchFamily="2" charset="-122"/>
-              <a:ea typeface="宋体" panose="02010600030101010101" pitchFamily="2" charset="-122"/>
-            </a:endParaRPr>
-          </a:p>
-        </p:txBody>
-      </p:sp>
-      <p:sp>
-        <p:nvSpPr>
-          <p:cNvPr id="132" name="矩形 131"/>
-          <p:cNvSpPr/>
-          <p:nvPr/>
-        </p:nvSpPr>
-        <p:spPr>
-          <a:xfrm>
-            <a:off x="9328785" y="1565275"/>
-            <a:ext cx="2082165" cy="3023870"/>
-          </a:xfrm>
-          <a:prstGeom prst="rect">
-            <a:avLst/>
-          </a:prstGeom>
-          <a:solidFill>
-            <a:srgbClr val="FFFFFF"/>
-          </a:solidFill>
-          <a:ln>
-            <a:solidFill>
-              <a:srgbClr val="BDD6EC"/>
-            </a:solidFill>
-          </a:ln>
-        </p:spPr>
-        <p:style>
-          <a:lnRef idx="0">
-            <a:srgbClr val="FFFFFF"/>
-          </a:lnRef>
-          <a:fillRef idx="1">
-            <a:schemeClr val="accent1"/>
-          </a:fillRef>
-          <a:effectRef idx="0">
-            <a:srgbClr val="FFFFFF"/>
-          </a:effectRef>
-          <a:fontRef idx="minor">
-            <a:schemeClr val="lt1"/>
-          </a:fontRef>
-        </p:style>
-        <p:txBody>
-          <a:bodyPr rtlCol="0" anchor="ctr"/>
-          <a:p>
-            <a:pPr algn="l"/>
-            <a:endParaRPr lang="zh-CN" altLang="en-US" sz="1300" b="1">
-              <a:solidFill>
-                <a:schemeClr val="tx1"/>
-              </a:solidFill>
-              <a:latin typeface="宋体" panose="02010600030101010101" pitchFamily="2" charset="-122"/>
-              <a:ea typeface="宋体" panose="02010600030101010101" pitchFamily="2" charset="-122"/>
-            </a:endParaRPr>
-          </a:p>
-        </p:txBody>
-      </p:sp>
+      </p:pic>
       <p:pic>
         <p:nvPicPr>
-          <p:cNvPr id="133" name="图片 132"/>
+          <p:cNvPr id="148" name="图片 147"/>
           <p:cNvPicPr>
             <a:picLocks noChangeAspect="1"/>
           </p:cNvPicPr>
           <p:nvPr/>
         </p:nvPicPr>
         <p:blipFill>
-          <a:blip r:embed="rId2"/>
+          <a:blip r:embed="rId7"/>
           <a:stretch>
             <a:fillRect/>
           </a:stretch>
         </p:blipFill>
         <p:spPr>
           <a:xfrm>
-            <a:off x="9347835" y="1572895"/>
-            <a:ext cx="2053590" cy="2953385"/>
+            <a:off x="266700" y="1673860"/>
+            <a:ext cx="471805" cy="371475"/>
           </a:xfrm>
           <a:prstGeom prst="rect">
             <a:avLst/>
           </a:prstGeom>
         </p:spPr>
       </p:pic>
-      <p:sp>
-        <p:nvSpPr>
-          <p:cNvPr id="134" name="矩形 133"/>
-          <p:cNvSpPr/>
-          <p:nvPr/>
-        </p:nvSpPr>
-        <p:spPr>
-          <a:xfrm>
-            <a:off x="9338310" y="4917440"/>
-            <a:ext cx="2072640" cy="459740"/>
-          </a:xfrm>
-          <a:prstGeom prst="rect">
-            <a:avLst/>
-          </a:prstGeom>
-          <a:solidFill>
-            <a:srgbClr val="D7D9D8"/>
-          </a:solidFill>
-          <a:ln>
-            <a:solidFill>
-              <a:srgbClr val="BDD6EC"/>
-            </a:solidFill>
-          </a:ln>
-        </p:spPr>
-        <p:style>
-          <a:lnRef idx="0">
-            <a:srgbClr val="FFFFFF"/>
-          </a:lnRef>
-          <a:fillRef idx="1">
-            <a:schemeClr val="accent1"/>
-          </a:fillRef>
-          <a:effectRef idx="0">
-            <a:srgbClr val="FFFFFF"/>
-          </a:effectRef>
-          <a:fontRef idx="minor">
-            <a:schemeClr val="lt1"/>
-          </a:fontRef>
-        </p:style>
-        <p:txBody>
-          <a:bodyPr rtlCol="0" anchor="ctr"/>
-          <a:p>
-            <a:pPr algn="ctr"/>
-            <a:r>
-              <a:rPr lang="zh-CN" altLang="en-US" sz="1400" b="1">
-                <a:solidFill>
-                  <a:schemeClr val="tx1"/>
-                </a:solidFill>
-                <a:latin typeface="宋体" panose="02010600030101010101" pitchFamily="2" charset="-122"/>
-                <a:ea typeface="宋体" panose="02010600030101010101" pitchFamily="2" charset="-122"/>
-              </a:rPr>
-              <a:t>性能指标</a:t>
-            </a:r>
-            <a:endParaRPr lang="zh-CN" altLang="en-US" sz="1400" b="1">
-              <a:solidFill>
-                <a:schemeClr val="tx1"/>
-              </a:solidFill>
-              <a:latin typeface="宋体" panose="02010600030101010101" pitchFamily="2" charset="-122"/>
-              <a:ea typeface="宋体" panose="02010600030101010101" pitchFamily="2" charset="-122"/>
-            </a:endParaRPr>
-          </a:p>
-        </p:txBody>
-      </p:sp>
-      <p:sp>
-        <p:nvSpPr>
-          <p:cNvPr id="135" name="矩形 134"/>
-          <p:cNvSpPr/>
-          <p:nvPr/>
-        </p:nvSpPr>
-        <p:spPr>
-          <a:xfrm>
-            <a:off x="9338310" y="5377180"/>
-            <a:ext cx="2072640" cy="1195705"/>
-          </a:xfrm>
-          <a:prstGeom prst="rect">
-            <a:avLst/>
-          </a:prstGeom>
-          <a:solidFill>
-            <a:srgbClr val="FFFFFF"/>
-          </a:solidFill>
-          <a:ln>
-            <a:solidFill>
-              <a:srgbClr val="BDD6EC"/>
-            </a:solidFill>
-          </a:ln>
-        </p:spPr>
-        <p:style>
-          <a:lnRef idx="0">
-            <a:srgbClr val="FFFFFF"/>
-          </a:lnRef>
-          <a:fillRef idx="1">
-            <a:schemeClr val="accent1"/>
-          </a:fillRef>
-          <a:effectRef idx="0">
-            <a:srgbClr val="FFFFFF"/>
-          </a:effectRef>
-          <a:fontRef idx="minor">
-            <a:schemeClr val="lt1"/>
-          </a:fontRef>
-        </p:style>
-        <p:txBody>
-          <a:bodyPr rtlCol="0" anchor="ctr"/>
-          <a:p>
-            <a:pPr algn="ctr"/>
-            <a:endParaRPr lang="zh-CN" altLang="en-US" sz="1300" b="1">
-              <a:solidFill>
-                <a:schemeClr val="tx1"/>
-              </a:solidFill>
-              <a:latin typeface="宋体" panose="02010600030101010101" pitchFamily="2" charset="-122"/>
-              <a:ea typeface="宋体" panose="02010600030101010101" pitchFamily="2" charset="-122"/>
-              <a:sym typeface="+mn-ea"/>
-            </a:endParaRPr>
-          </a:p>
-        </p:txBody>
-      </p:sp>
-      <p:sp>
-        <p:nvSpPr>
-          <p:cNvPr id="136" name="文本框 135"/>
-          <p:cNvSpPr txBox="1"/>
-          <p:nvPr/>
-        </p:nvSpPr>
-        <p:spPr>
-          <a:xfrm>
-            <a:off x="9939655" y="5434330"/>
-            <a:ext cx="892810" cy="306705"/>
-          </a:xfrm>
-          <a:prstGeom prst="rect">
-            <a:avLst/>
-          </a:prstGeom>
-          <a:noFill/>
-        </p:spPr>
-        <p:txBody>
-          <a:bodyPr wrap="square" rtlCol="0">
-            <a:spAutoFit/>
-          </a:bodyPr>
-          <a:p>
-            <a:pPr algn="l"/>
-            <a:r>
-              <a:rPr lang="zh-CN" altLang="en-US" sz="1400" b="1">
-                <a:solidFill>
-                  <a:schemeClr val="tx1"/>
-                </a:solidFill>
-                <a:latin typeface="宋体" panose="02010600030101010101" pitchFamily="2" charset="-122"/>
-                <a:ea typeface="宋体" panose="02010600030101010101" pitchFamily="2" charset="-122"/>
-                <a:sym typeface="+mn-ea"/>
-              </a:rPr>
-              <a:t>高帧率</a:t>
-            </a:r>
-            <a:endParaRPr lang="zh-CN" altLang="en-US" sz="1400" b="1">
-              <a:solidFill>
-                <a:schemeClr val="tx1"/>
-              </a:solidFill>
-              <a:latin typeface="宋体" panose="02010600030101010101" pitchFamily="2" charset="-122"/>
-              <a:ea typeface="宋体" panose="02010600030101010101" pitchFamily="2" charset="-122"/>
-              <a:sym typeface="+mn-ea"/>
-            </a:endParaRPr>
-          </a:p>
-        </p:txBody>
-      </p:sp>
-      <p:sp>
-        <p:nvSpPr>
-          <p:cNvPr id="137" name="文本框 136"/>
-          <p:cNvSpPr txBox="1"/>
-          <p:nvPr/>
-        </p:nvSpPr>
-        <p:spPr>
-          <a:xfrm>
-            <a:off x="9942830" y="5828030"/>
-            <a:ext cx="892810" cy="306705"/>
-          </a:xfrm>
-          <a:prstGeom prst="rect">
-            <a:avLst/>
-          </a:prstGeom>
-          <a:noFill/>
-        </p:spPr>
-        <p:txBody>
-          <a:bodyPr wrap="square" rtlCol="0">
-            <a:spAutoFit/>
-          </a:bodyPr>
-          <a:p>
-            <a:pPr algn="l"/>
-            <a:r>
-              <a:rPr lang="zh-CN" altLang="en-US" sz="1400" b="1">
-                <a:solidFill>
-                  <a:schemeClr val="tx1"/>
-                </a:solidFill>
-                <a:latin typeface="宋体" panose="02010600030101010101" pitchFamily="2" charset="-122"/>
-                <a:ea typeface="宋体" panose="02010600030101010101" pitchFamily="2" charset="-122"/>
-                <a:sym typeface="+mn-ea"/>
-              </a:rPr>
-              <a:t>低延迟</a:t>
-            </a:r>
-            <a:endParaRPr lang="zh-CN" altLang="en-US" sz="1400" b="1">
-              <a:solidFill>
-                <a:schemeClr val="tx1"/>
-              </a:solidFill>
-              <a:latin typeface="宋体" panose="02010600030101010101" pitchFamily="2" charset="-122"/>
-              <a:ea typeface="宋体" panose="02010600030101010101" pitchFamily="2" charset="-122"/>
-              <a:sym typeface="+mn-ea"/>
-            </a:endParaRPr>
-          </a:p>
-        </p:txBody>
-      </p:sp>
-      <p:sp>
-        <p:nvSpPr>
-          <p:cNvPr id="138" name="文本框 137"/>
-          <p:cNvSpPr txBox="1"/>
-          <p:nvPr/>
-        </p:nvSpPr>
-        <p:spPr>
-          <a:xfrm>
-            <a:off x="9952355" y="6201410"/>
-            <a:ext cx="1254125" cy="306705"/>
-          </a:xfrm>
-          <a:prstGeom prst="rect">
-            <a:avLst/>
-          </a:prstGeom>
-          <a:noFill/>
-        </p:spPr>
-        <p:txBody>
-          <a:bodyPr wrap="square" rtlCol="0">
-            <a:spAutoFit/>
-          </a:bodyPr>
-          <a:p>
-            <a:pPr algn="l"/>
-            <a:r>
-              <a:rPr lang="en-US" altLang="zh-CN" sz="1400" b="1">
-                <a:solidFill>
-                  <a:schemeClr val="tx1"/>
-                </a:solidFill>
-                <a:latin typeface="宋体" panose="02010600030101010101" pitchFamily="2" charset="-122"/>
-                <a:ea typeface="宋体" panose="02010600030101010101" pitchFamily="2" charset="-122"/>
-                <a:sym typeface="+mn-ea"/>
-              </a:rPr>
-              <a:t>GPU</a:t>
-            </a:r>
-            <a:r>
-              <a:rPr lang="zh-CN" altLang="en-US" sz="1400" b="1">
-                <a:solidFill>
-                  <a:schemeClr val="tx1"/>
-                </a:solidFill>
-                <a:latin typeface="宋体" panose="02010600030101010101" pitchFamily="2" charset="-122"/>
-                <a:ea typeface="宋体" panose="02010600030101010101" pitchFamily="2" charset="-122"/>
-                <a:sym typeface="+mn-ea"/>
-              </a:rPr>
-              <a:t>负载降低</a:t>
-            </a:r>
-            <a:endParaRPr lang="zh-CN" altLang="en-US" sz="1400" b="1">
-              <a:solidFill>
-                <a:schemeClr val="tx1"/>
-              </a:solidFill>
-              <a:latin typeface="宋体" panose="02010600030101010101" pitchFamily="2" charset="-122"/>
-              <a:ea typeface="宋体" panose="02010600030101010101" pitchFamily="2" charset="-122"/>
-              <a:sym typeface="+mn-ea"/>
-            </a:endParaRPr>
-          </a:p>
-        </p:txBody>
-      </p:sp>
       <p:pic>
         <p:nvPicPr>
-          <p:cNvPr id="139" name="图片 138"/>
+          <p:cNvPr id="149" name="图片 148"/>
           <p:cNvPicPr>
             <a:picLocks noChangeAspect="1"/>
           </p:cNvPicPr>
           <p:nvPr/>
         </p:nvPicPr>
         <p:blipFill>
-          <a:blip r:embed="rId3"/>
+          <a:blip r:embed="rId8"/>
           <a:stretch>
             <a:fillRect/>
           </a:stretch>
         </p:blipFill>
         <p:spPr>
           <a:xfrm>
-            <a:off x="9520555" y="5404485"/>
-            <a:ext cx="409575" cy="337820"/>
+            <a:off x="307340" y="2892425"/>
+            <a:ext cx="465455" cy="427355"/>
           </a:xfrm>
           <a:prstGeom prst="rect">
             <a:avLst/>
@@ -4880,75 +5692,51 @@
       </p:pic>
       <p:pic>
         <p:nvPicPr>
-          <p:cNvPr id="140" name="图片 139"/>
+          <p:cNvPr id="160" name="图片 159"/>
           <p:cNvPicPr>
             <a:picLocks noChangeAspect="1"/>
           </p:cNvPicPr>
           <p:nvPr/>
         </p:nvPicPr>
         <p:blipFill>
-          <a:blip r:embed="rId4"/>
+          <a:blip r:embed="rId9"/>
           <a:stretch>
             <a:fillRect/>
           </a:stretch>
         </p:blipFill>
         <p:spPr>
           <a:xfrm>
-            <a:off x="9562465" y="5780405"/>
-            <a:ext cx="352425" cy="382905"/>
+            <a:off x="280670" y="4938395"/>
+            <a:ext cx="476250" cy="349250"/>
           </a:xfrm>
           <a:prstGeom prst="rect">
             <a:avLst/>
           </a:prstGeom>
         </p:spPr>
       </p:pic>
-      <p:pic>
-        <p:nvPicPr>
-          <p:cNvPr id="141" name="图片 140"/>
-          <p:cNvPicPr>
-            <a:picLocks noChangeAspect="1"/>
-          </p:cNvPicPr>
-          <p:nvPr/>
-        </p:nvPicPr>
-        <p:blipFill>
-          <a:blip r:embed="rId5"/>
-          <a:stretch>
-            <a:fillRect/>
-          </a:stretch>
-        </p:blipFill>
-        <p:spPr>
-          <a:xfrm>
-            <a:off x="9501505" y="6125210"/>
-            <a:ext cx="428625" cy="405130"/>
-          </a:xfrm>
-          <a:prstGeom prst="rect">
-            <a:avLst/>
-          </a:prstGeom>
-        </p:spPr>
-      </p:pic>
       <p:cxnSp>
         <p:nvCxnSpPr>
-          <p:cNvPr id="150" name="直接箭头连接符 149"/>
+          <p:cNvPr id="161" name="肘形连接符 160"/>
           <p:cNvCxnSpPr>
-            <a:stCxn id="83" idx="2"/>
-            <a:endCxn id="85" idx="0"/>
+            <a:stCxn id="55" idx="3"/>
+            <a:endCxn id="73" idx="1"/>
           </p:cNvCxnSpPr>
           <p:nvPr/>
         </p:nvCxnSpPr>
         <p:spPr>
-          <a:xfrm>
-            <a:off x="5840730" y="1565275"/>
-            <a:ext cx="635" cy="381000"/>
-          </a:xfrm>
-          <a:prstGeom prst="straightConnector1">
-            <a:avLst/>
+          <a:xfrm flipV="1">
+            <a:off x="2223770" y="751205"/>
+            <a:ext cx="727710" cy="4372610"/>
+          </a:xfrm>
+          <a:prstGeom prst="bentConnector3">
+            <a:avLst>
+              <a:gd name="adj1" fmla="val 50000"/>
+            </a:avLst>
           </a:prstGeom>
           <a:ln w="19050">
             <a:solidFill>
               <a:schemeClr val="tx1"/>
             </a:solidFill>
-            <a:headEnd type="none"/>
-            <a:tailEnd type="triangle" w="med" len="med"/>
           </a:ln>
         </p:spPr>
         <p:style>
@@ -4968,27 +5756,27 @@
       </p:cxnSp>
       <p:cxnSp>
         <p:nvCxnSpPr>
-          <p:cNvPr id="151" name="直接箭头连接符 150"/>
+          <p:cNvPr id="162" name="肘形连接符 161"/>
           <p:cNvCxnSpPr>
-            <a:stCxn id="85" idx="2"/>
-            <a:endCxn id="86" idx="0"/>
+            <a:stCxn id="51" idx="3"/>
+            <a:endCxn id="73" idx="1"/>
           </p:cNvCxnSpPr>
           <p:nvPr/>
         </p:nvCxnSpPr>
         <p:spPr>
-          <a:xfrm>
-            <a:off x="5841365" y="2406015"/>
-            <a:ext cx="0" cy="287020"/>
-          </a:xfrm>
-          <a:prstGeom prst="straightConnector1">
-            <a:avLst/>
+          <a:xfrm flipV="1">
+            <a:off x="2214880" y="751205"/>
+            <a:ext cx="736600" cy="2348230"/>
+          </a:xfrm>
+          <a:prstGeom prst="bentConnector3">
+            <a:avLst>
+              <a:gd name="adj1" fmla="val 50000"/>
+            </a:avLst>
           </a:prstGeom>
           <a:ln w="19050">
             <a:solidFill>
               <a:schemeClr val="tx1"/>
             </a:solidFill>
-            <a:headEnd type="none"/>
-            <a:tailEnd type="triangle" w="med" len="med"/>
           </a:ln>
         </p:spPr>
         <p:style>
@@ -5008,26 +5796,27 @@
       </p:cxnSp>
       <p:cxnSp>
         <p:nvCxnSpPr>
-          <p:cNvPr id="152" name="直接箭头连接符 151"/>
+          <p:cNvPr id="163" name="肘形连接符 162"/>
           <p:cNvCxnSpPr>
-            <a:stCxn id="86" idx="2"/>
+            <a:stCxn id="46" idx="3"/>
+            <a:endCxn id="73" idx="1"/>
           </p:cNvCxnSpPr>
           <p:nvPr/>
         </p:nvCxnSpPr>
         <p:spPr>
-          <a:xfrm>
-            <a:off x="5841365" y="3152775"/>
-            <a:ext cx="1905" cy="213995"/>
-          </a:xfrm>
-          <a:prstGeom prst="straightConnector1">
-            <a:avLst/>
+          <a:xfrm flipV="1">
+            <a:off x="2214880" y="751205"/>
+            <a:ext cx="736600" cy="1103630"/>
+          </a:xfrm>
+          <a:prstGeom prst="bentConnector3">
+            <a:avLst>
+              <a:gd name="adj1" fmla="val 50000"/>
+            </a:avLst>
           </a:prstGeom>
           <a:ln w="19050">
             <a:solidFill>
               <a:schemeClr val="tx1"/>
             </a:solidFill>
-            <a:headEnd type="none"/>
-            <a:tailEnd type="triangle" w="med" len="med"/>
           </a:ln>
         </p:spPr>
         <p:style>
@@ -5047,97 +5836,17 @@
       </p:cxnSp>
       <p:cxnSp>
         <p:nvCxnSpPr>
-          <p:cNvPr id="153" name="直接箭头连接符 152"/>
+          <p:cNvPr id="164" name="肘形连接符 163"/>
           <p:cNvCxnSpPr>
-            <a:stCxn id="89" idx="2"/>
-            <a:endCxn id="96" idx="0"/>
+            <a:stCxn id="42" idx="3"/>
+            <a:endCxn id="73" idx="1"/>
           </p:cNvCxnSpPr>
           <p:nvPr/>
         </p:nvCxnSpPr>
         <p:spPr>
           <a:xfrm>
-            <a:off x="5840730" y="4655185"/>
-            <a:ext cx="635" cy="213995"/>
-          </a:xfrm>
-          <a:prstGeom prst="straightConnector1">
-            <a:avLst/>
-          </a:prstGeom>
-          <a:ln w="19050">
-            <a:solidFill>
-              <a:schemeClr val="tx1"/>
-            </a:solidFill>
-            <a:headEnd type="none"/>
-            <a:tailEnd type="triangle" w="med" len="med"/>
-          </a:ln>
-        </p:spPr>
-        <p:style>
-          <a:lnRef idx="2">
-            <a:schemeClr val="accent1"/>
-          </a:lnRef>
-          <a:fillRef idx="0">
-            <a:srgbClr val="FFFFFF"/>
-          </a:fillRef>
-          <a:effectRef idx="0">
-            <a:srgbClr val="FFFFFF"/>
-          </a:effectRef>
-          <a:fontRef idx="minor">
-            <a:schemeClr val="tx1"/>
-          </a:fontRef>
-        </p:style>
-      </p:cxnSp>
-      <p:cxnSp>
-        <p:nvCxnSpPr>
-          <p:cNvPr id="154" name="直接箭头连接符 153"/>
-          <p:cNvCxnSpPr>
-            <a:stCxn id="96" idx="2"/>
-            <a:endCxn id="127" idx="0"/>
-          </p:cNvCxnSpPr>
-          <p:nvPr/>
-        </p:nvCxnSpPr>
-        <p:spPr>
-          <a:xfrm flipH="1">
-            <a:off x="5833745" y="5868035"/>
-            <a:ext cx="7620" cy="247650"/>
-          </a:xfrm>
-          <a:prstGeom prst="straightConnector1">
-            <a:avLst/>
-          </a:prstGeom>
-          <a:ln w="19050">
-            <a:solidFill>
-              <a:schemeClr val="tx1"/>
-            </a:solidFill>
-            <a:headEnd type="none"/>
-            <a:tailEnd type="triangle" w="med" len="med"/>
-          </a:ln>
-        </p:spPr>
-        <p:style>
-          <a:lnRef idx="2">
-            <a:schemeClr val="accent1"/>
-          </a:lnRef>
-          <a:fillRef idx="0">
-            <a:srgbClr val="FFFFFF"/>
-          </a:fillRef>
-          <a:effectRef idx="0">
-            <a:srgbClr val="FFFFFF"/>
-          </a:effectRef>
-          <a:fontRef idx="minor">
-            <a:schemeClr val="tx1"/>
-          </a:fontRef>
-        </p:style>
-      </p:cxnSp>
-      <p:cxnSp>
-        <p:nvCxnSpPr>
-          <p:cNvPr id="155" name="肘形连接符 154"/>
-          <p:cNvCxnSpPr>
-            <a:stCxn id="128" idx="3"/>
-            <a:endCxn id="131" idx="1"/>
-          </p:cNvCxnSpPr>
-          <p:nvPr/>
-        </p:nvCxnSpPr>
-        <p:spPr>
-          <a:xfrm flipV="1">
-            <a:off x="8538845" y="1335405"/>
-            <a:ext cx="789940" cy="4999355"/>
+            <a:off x="2214880" y="735330"/>
+            <a:ext cx="736600" cy="15875"/>
           </a:xfrm>
           <a:prstGeom prst="bentConnector3">
             <a:avLst>
@@ -5169,17 +5878,17 @@
       </p:cxnSp>
       <p:cxnSp>
         <p:nvCxnSpPr>
-          <p:cNvPr id="156" name="直接箭头连接符 155"/>
+          <p:cNvPr id="165" name="直接箭头连接符 164"/>
           <p:cNvCxnSpPr>
-            <a:stCxn id="132" idx="2"/>
-            <a:endCxn id="134" idx="0"/>
+            <a:stCxn id="59" idx="2"/>
+            <a:endCxn id="60" idx="0"/>
           </p:cNvCxnSpPr>
           <p:nvPr/>
         </p:nvCxnSpPr>
         <p:spPr>
           <a:xfrm>
-            <a:off x="10370185" y="4589145"/>
-            <a:ext cx="4445" cy="328295"/>
+            <a:off x="5664835" y="965200"/>
+            <a:ext cx="635" cy="381000"/>
           </a:xfrm>
           <a:prstGeom prst="straightConnector1">
             <a:avLst/>
@@ -5207,163 +5916,247 @@
           </a:fontRef>
         </p:style>
       </p:cxnSp>
-      <p:sp>
-        <p:nvSpPr>
-          <p:cNvPr id="157" name="矩形 156"/>
-          <p:cNvSpPr/>
+      <p:cxnSp>
+        <p:nvCxnSpPr>
+          <p:cNvPr id="166" name="直接箭头连接符 165"/>
+          <p:cNvCxnSpPr>
+            <a:stCxn id="60" idx="2"/>
+            <a:endCxn id="64" idx="0"/>
+          </p:cNvCxnSpPr>
           <p:nvPr/>
-        </p:nvSpPr>
-        <p:spPr>
-          <a:xfrm>
-            <a:off x="102870" y="187325"/>
-            <a:ext cx="11663045" cy="6585585"/>
-          </a:xfrm>
-          <a:prstGeom prst="rect">
+        </p:nvCxnSpPr>
+        <p:spPr>
+          <a:xfrm>
+            <a:off x="5665470" y="1805940"/>
+            <a:ext cx="0" cy="287020"/>
+          </a:xfrm>
+          <a:prstGeom prst="straightConnector1">
             <a:avLst/>
           </a:prstGeom>
-          <a:noFill/>
-          <a:ln>
+          <a:ln w="19050">
             <a:solidFill>
               <a:schemeClr val="tx1"/>
             </a:solidFill>
-            <a:prstDash val="sysDash"/>
+            <a:headEnd type="none"/>
+            <a:tailEnd type="triangle" w="med" len="med"/>
           </a:ln>
-          <a:extLst>
-            <a:ext uri="{909E8E84-426E-40DD-AFC4-6F175D3DCCD1}">
-              <a14:hiddenFill xmlns:a14="http://schemas.microsoft.com/office/drawing/2010/main">
-                <a:solidFill>
-                  <a:srgbClr val="EFEFEF"/>
-                </a:solidFill>
-              </a14:hiddenFill>
-            </a:ext>
-          </a:extLst>
         </p:spPr>
         <p:style>
           <a:lnRef idx="2">
-            <a:schemeClr val="accent1">
-              <a:lumMod val="75000"/>
-            </a:schemeClr>
+            <a:schemeClr val="accent1"/>
           </a:lnRef>
-          <a:fillRef idx="1">
-            <a:schemeClr val="accent1"/>
+          <a:fillRef idx="0">
+            <a:srgbClr val="FFFFFF"/>
           </a:fillRef>
           <a:effectRef idx="0">
             <a:srgbClr val="FFFFFF"/>
           </a:effectRef>
           <a:fontRef idx="minor">
-            <a:schemeClr val="lt1"/>
+            <a:schemeClr val="tx1"/>
           </a:fontRef>
         </p:style>
-        <p:txBody>
-          <a:bodyPr rtlCol="0" anchor="ctr"/>
-          <a:p>
-            <a:pPr algn="ctr"/>
-            <a:endParaRPr lang="zh-CN" altLang="en-US" b="1"/>
-          </a:p>
-        </p:txBody>
-      </p:sp>
-      <p:sp>
-        <p:nvSpPr>
-          <p:cNvPr id="158" name="文本框 157"/>
-          <p:cNvSpPr txBox="1"/>
+      </p:cxnSp>
+      <p:cxnSp>
+        <p:nvCxnSpPr>
+          <p:cNvPr id="167" name="直接箭头连接符 166"/>
+          <p:cNvCxnSpPr>
+            <a:stCxn id="64" idx="2"/>
+          </p:cNvCxnSpPr>
           <p:nvPr/>
-        </p:nvSpPr>
-        <p:spPr>
-          <a:xfrm>
-            <a:off x="4257040" y="259715"/>
-            <a:ext cx="3713480" cy="337185"/>
-          </a:xfrm>
-          <a:prstGeom prst="rect">
+        </p:nvCxnSpPr>
+        <p:spPr>
+          <a:xfrm>
+            <a:off x="5665470" y="2552700"/>
+            <a:ext cx="1905" cy="213995"/>
+          </a:xfrm>
+          <a:prstGeom prst="straightConnector1">
             <a:avLst/>
           </a:prstGeom>
-          <a:noFill/>
-        </p:spPr>
-        <p:txBody>
-          <a:bodyPr wrap="square" rtlCol="0">
-            <a:spAutoFit/>
-          </a:bodyPr>
-          <a:p>
-            <a:r>
-              <a:rPr lang="zh-CN" altLang="en-US" sz="1600" b="1">
-                <a:solidFill>
-                  <a:schemeClr val="tx1"/>
-                </a:solidFill>
-                <a:latin typeface="宋体" panose="02010600030101010101" pitchFamily="2" charset="-122"/>
-                <a:ea typeface="宋体" panose="02010600030101010101" pitchFamily="2" charset="-122"/>
-              </a:rPr>
-              <a:t>感知自适应动态分辨率渲染算法框架</a:t>
-            </a:r>
-            <a:endParaRPr lang="zh-CN" altLang="en-US" sz="1600" b="1">
-              <a:solidFill>
-                <a:schemeClr val="tx1"/>
-              </a:solidFill>
-              <a:latin typeface="宋体" panose="02010600030101010101" pitchFamily="2" charset="-122"/>
-              <a:ea typeface="宋体" panose="02010600030101010101" pitchFamily="2" charset="-122"/>
-            </a:endParaRPr>
-          </a:p>
-        </p:txBody>
-      </p:sp>
-      <p:sp>
-        <p:nvSpPr>
-          <p:cNvPr id="159" name="矩形 158"/>
-          <p:cNvSpPr/>
+          <a:ln w="19050">
+            <a:solidFill>
+              <a:schemeClr val="tx1"/>
+            </a:solidFill>
+            <a:headEnd type="none"/>
+            <a:tailEnd type="triangle" w="med" len="med"/>
+          </a:ln>
+        </p:spPr>
+        <p:style>
+          <a:lnRef idx="2">
+            <a:schemeClr val="accent1"/>
+          </a:lnRef>
+          <a:fillRef idx="0">
+            <a:srgbClr val="FFFFFF"/>
+          </a:fillRef>
+          <a:effectRef idx="0">
+            <a:srgbClr val="FFFFFF"/>
+          </a:effectRef>
+          <a:fontRef idx="minor">
+            <a:schemeClr val="tx1"/>
+          </a:fontRef>
+        </p:style>
+      </p:cxnSp>
+      <p:cxnSp>
+        <p:nvCxnSpPr>
+          <p:cNvPr id="168" name="直接箭头连接符 167"/>
+          <p:cNvCxnSpPr>
+            <a:stCxn id="65" idx="2"/>
+            <a:endCxn id="72" idx="0"/>
+          </p:cNvCxnSpPr>
           <p:nvPr/>
-        </p:nvSpPr>
-        <p:spPr>
-          <a:xfrm>
-            <a:off x="421640" y="5195570"/>
-            <a:ext cx="1986280" cy="459740"/>
-          </a:xfrm>
-          <a:prstGeom prst="rect">
+        </p:nvCxnSpPr>
+        <p:spPr>
+          <a:xfrm>
+            <a:off x="5664835" y="4055110"/>
+            <a:ext cx="635" cy="213995"/>
+          </a:xfrm>
+          <a:prstGeom prst="straightConnector1">
             <a:avLst/>
           </a:prstGeom>
-          <a:solidFill>
-            <a:srgbClr val="BFD8EC"/>
-          </a:solidFill>
-          <a:ln>
+          <a:ln w="19050">
             <a:solidFill>
-              <a:srgbClr val="BDD6EC"/>
+              <a:schemeClr val="tx1"/>
             </a:solidFill>
+            <a:headEnd type="none"/>
+            <a:tailEnd type="triangle" w="med" len="med"/>
           </a:ln>
         </p:spPr>
         <p:style>
-          <a:lnRef idx="0">
-            <a:srgbClr val="FFFFFF"/>
+          <a:lnRef idx="2">
+            <a:schemeClr val="accent1"/>
           </a:lnRef>
-          <a:fillRef idx="1">
-            <a:schemeClr val="accent1"/>
+          <a:fillRef idx="0">
+            <a:srgbClr val="FFFFFF"/>
           </a:fillRef>
           <a:effectRef idx="0">
             <a:srgbClr val="FFFFFF"/>
           </a:effectRef>
           <a:fontRef idx="minor">
-            <a:schemeClr val="lt1"/>
+            <a:schemeClr val="tx1"/>
           </a:fontRef>
         </p:style>
-        <p:txBody>
-          <a:bodyPr rtlCol="0" anchor="ctr"/>
-          <a:p>
-            <a:pPr algn="ctr"/>
-            <a:r>
-              <a:rPr lang="zh-CN" sz="1400" b="1">
-                <a:solidFill>
-                  <a:schemeClr val="tx1"/>
-                </a:solidFill>
-                <a:latin typeface="宋体" panose="02010600030101010101" pitchFamily="2" charset="-122"/>
-                <a:ea typeface="宋体" panose="02010600030101010101" pitchFamily="2" charset="-122"/>
-              </a:rPr>
-              <a:t>偏心度阈值</a:t>
-            </a:r>
-            <a:endParaRPr lang="zh-CN" sz="1400" b="1">
-              <a:solidFill>
-                <a:schemeClr val="tx1"/>
-              </a:solidFill>
-              <a:latin typeface="宋体" panose="02010600030101010101" pitchFamily="2" charset="-122"/>
-              <a:ea typeface="宋体" panose="02010600030101010101" pitchFamily="2" charset="-122"/>
-            </a:endParaRPr>
-          </a:p>
-        </p:txBody>
-      </p:sp>
+      </p:cxnSp>
+      <p:cxnSp>
+        <p:nvCxnSpPr>
+          <p:cNvPr id="169" name="直接箭头连接符 168"/>
+          <p:cNvCxnSpPr>
+            <a:stCxn id="72" idx="2"/>
+            <a:endCxn id="113" idx="0"/>
+          </p:cNvCxnSpPr>
+          <p:nvPr/>
+        </p:nvCxnSpPr>
+        <p:spPr>
+          <a:xfrm flipH="1">
+            <a:off x="5657850" y="5267960"/>
+            <a:ext cx="7620" cy="247650"/>
+          </a:xfrm>
+          <a:prstGeom prst="straightConnector1">
+            <a:avLst/>
+          </a:prstGeom>
+          <a:ln w="19050">
+            <a:solidFill>
+              <a:schemeClr val="tx1"/>
+            </a:solidFill>
+            <a:headEnd type="none"/>
+            <a:tailEnd type="triangle" w="med" len="med"/>
+          </a:ln>
+        </p:spPr>
+        <p:style>
+          <a:lnRef idx="2">
+            <a:schemeClr val="accent1"/>
+          </a:lnRef>
+          <a:fillRef idx="0">
+            <a:srgbClr val="FFFFFF"/>
+          </a:fillRef>
+          <a:effectRef idx="0">
+            <a:srgbClr val="FFFFFF"/>
+          </a:effectRef>
+          <a:fontRef idx="minor">
+            <a:schemeClr val="tx1"/>
+          </a:fontRef>
+        </p:style>
+      </p:cxnSp>
+      <p:cxnSp>
+        <p:nvCxnSpPr>
+          <p:cNvPr id="170" name="肘形连接符 169"/>
+          <p:cNvCxnSpPr>
+            <a:stCxn id="114" idx="3"/>
+            <a:endCxn id="117" idx="1"/>
+          </p:cNvCxnSpPr>
+          <p:nvPr/>
+        </p:nvCxnSpPr>
+        <p:spPr>
+          <a:xfrm flipV="1">
+            <a:off x="8362950" y="735330"/>
+            <a:ext cx="789940" cy="5014595"/>
+          </a:xfrm>
+          <a:prstGeom prst="bentConnector3">
+            <a:avLst>
+              <a:gd name="adj1" fmla="val 50011"/>
+            </a:avLst>
+          </a:prstGeom>
+          <a:ln w="19050">
+            <a:solidFill>
+              <a:schemeClr val="tx1"/>
+            </a:solidFill>
+            <a:headEnd type="none"/>
+            <a:tailEnd type="triangle" w="med" len="med"/>
+          </a:ln>
+        </p:spPr>
+        <p:style>
+          <a:lnRef idx="2">
+            <a:schemeClr val="accent1"/>
+          </a:lnRef>
+          <a:fillRef idx="0">
+            <a:srgbClr val="FFFFFF"/>
+          </a:fillRef>
+          <a:effectRef idx="0">
+            <a:srgbClr val="FFFFFF"/>
+          </a:effectRef>
+          <a:fontRef idx="minor">
+            <a:schemeClr val="tx1"/>
+          </a:fontRef>
+        </p:style>
+      </p:cxnSp>
+      <p:cxnSp>
+        <p:nvCxnSpPr>
+          <p:cNvPr id="171" name="直接箭头连接符 170"/>
+          <p:cNvCxnSpPr>
+            <a:stCxn id="118" idx="2"/>
+            <a:endCxn id="123" idx="0"/>
+          </p:cNvCxnSpPr>
+          <p:nvPr/>
+        </p:nvCxnSpPr>
+        <p:spPr>
+          <a:xfrm>
+            <a:off x="10194290" y="3989070"/>
+            <a:ext cx="4445" cy="328295"/>
+          </a:xfrm>
+          <a:prstGeom prst="straightConnector1">
+            <a:avLst/>
+          </a:prstGeom>
+          <a:ln w="19050">
+            <a:solidFill>
+              <a:schemeClr val="tx1"/>
+            </a:solidFill>
+            <a:headEnd type="none"/>
+            <a:tailEnd type="triangle" w="med" len="med"/>
+          </a:ln>
+        </p:spPr>
+        <p:style>
+          <a:lnRef idx="2">
+            <a:schemeClr val="accent1"/>
+          </a:lnRef>
+          <a:fillRef idx="0">
+            <a:srgbClr val="FFFFFF"/>
+          </a:fillRef>
+          <a:effectRef idx="0">
+            <a:srgbClr val="FFFFFF"/>
+          </a:effectRef>
+          <a:fontRef idx="minor">
+            <a:schemeClr val="tx1"/>
+          </a:fontRef>
+        </p:style>
+      </p:cxnSp>
     </p:spTree>
   </p:cSld>
   <p:clrMapOvr>
